--- a/figures/Figure_4.pptx
+++ b/figures/Figure_4.pptx
@@ -2,12 +2,12 @@
 <file path=ppt/presentation.xml><?xml version="1.0" encoding="utf-8"?>
 <p:presentation xmlns:a="http://schemas.openxmlformats.org/drawingml/2006/main" xmlns:r="http://schemas.openxmlformats.org/officeDocument/2006/relationships" xmlns:p="http://schemas.openxmlformats.org/presentationml/2006/main" saveSubsetFonts="1" autoCompressPictures="0">
   <p:sldMasterIdLst>
-    <p:sldMasterId id="2147483720" r:id="rId1"/>
+    <p:sldMasterId id="2147483744" r:id="rId1"/>
   </p:sldMasterIdLst>
   <p:sldIdLst>
     <p:sldId id="256" r:id="rId2"/>
   </p:sldIdLst>
-  <p:sldSz cx="6119813" cy="1871663"/>
+  <p:sldSz cx="3060700" cy="1619250"/>
   <p:notesSz cx="6858000" cy="9144000"/>
   <p:defaultTextStyle>
     <a:defPPr>
@@ -141,15 +141,15 @@
         </p:nvSpPr>
         <p:spPr>
           <a:xfrm>
-            <a:off x="764977" y="306312"/>
-            <a:ext cx="4589860" cy="651616"/>
+            <a:off x="382588" y="265002"/>
+            <a:ext cx="2295525" cy="563739"/>
           </a:xfrm>
         </p:spPr>
         <p:txBody>
           <a:bodyPr anchor="b"/>
           <a:lstStyle>
             <a:lvl1pPr algn="ctr">
-              <a:defRPr sz="1637"/>
+              <a:defRPr sz="1417"/>
             </a:lvl1pPr>
           </a:lstStyle>
           <a:p>
@@ -173,8 +173,8 @@
         </p:nvSpPr>
         <p:spPr>
           <a:xfrm>
-            <a:off x="764977" y="983057"/>
-            <a:ext cx="4589860" cy="451885"/>
+            <a:off x="382588" y="850481"/>
+            <a:ext cx="2295525" cy="390944"/>
           </a:xfrm>
         </p:spPr>
         <p:txBody>
@@ -182,39 +182,39 @@
           <a:lstStyle>
             <a:lvl1pPr marL="0" indent="0" algn="ctr">
               <a:buNone/>
-              <a:defRPr sz="655"/>
+              <a:defRPr sz="567"/>
             </a:lvl1pPr>
-            <a:lvl2pPr marL="124770" indent="0" algn="ctr">
-              <a:buNone/>
-              <a:defRPr sz="546"/>
+            <a:lvl2pPr marL="107945" indent="0" algn="ctr">
+              <a:buNone/>
+              <a:defRPr sz="472"/>
             </a:lvl2pPr>
-            <a:lvl3pPr marL="249540" indent="0" algn="ctr">
-              <a:buNone/>
-              <a:defRPr sz="491"/>
+            <a:lvl3pPr marL="215890" indent="0" algn="ctr">
+              <a:buNone/>
+              <a:defRPr sz="425"/>
             </a:lvl3pPr>
-            <a:lvl4pPr marL="374310" indent="0" algn="ctr">
-              <a:buNone/>
-              <a:defRPr sz="437"/>
+            <a:lvl4pPr marL="323835" indent="0" algn="ctr">
+              <a:buNone/>
+              <a:defRPr sz="378"/>
             </a:lvl4pPr>
-            <a:lvl5pPr marL="499080" indent="0" algn="ctr">
-              <a:buNone/>
-              <a:defRPr sz="437"/>
+            <a:lvl5pPr marL="431780" indent="0" algn="ctr">
+              <a:buNone/>
+              <a:defRPr sz="378"/>
             </a:lvl5pPr>
-            <a:lvl6pPr marL="623849" indent="0" algn="ctr">
-              <a:buNone/>
-              <a:defRPr sz="437"/>
+            <a:lvl6pPr marL="539725" indent="0" algn="ctr">
+              <a:buNone/>
+              <a:defRPr sz="378"/>
             </a:lvl6pPr>
-            <a:lvl7pPr marL="748619" indent="0" algn="ctr">
-              <a:buNone/>
-              <a:defRPr sz="437"/>
+            <a:lvl7pPr marL="647670" indent="0" algn="ctr">
+              <a:buNone/>
+              <a:defRPr sz="378"/>
             </a:lvl7pPr>
-            <a:lvl8pPr marL="873389" indent="0" algn="ctr">
-              <a:buNone/>
-              <a:defRPr sz="437"/>
+            <a:lvl8pPr marL="755614" indent="0" algn="ctr">
+              <a:buNone/>
+              <a:defRPr sz="378"/>
             </a:lvl8pPr>
-            <a:lvl9pPr marL="998159" indent="0" algn="ctr">
-              <a:buNone/>
-              <a:defRPr sz="437"/>
+            <a:lvl9pPr marL="863559" indent="0" algn="ctr">
+              <a:buNone/>
+              <a:defRPr sz="378"/>
             </a:lvl9pPr>
           </a:lstStyle>
           <a:p>
@@ -243,7 +243,7 @@
           <a:p>
             <a:fld id="{ED160DB6-C0DC-8946-AD05-C0754294CFDE}" type="datetimeFigureOut">
               <a:rPr lang="fr-FR" smtClean="0"/>
-              <a:t>25/06/2025</a:t>
+              <a:t>17/07/2025</a:t>
             </a:fld>
             <a:endParaRPr lang="fr-FR"/>
           </a:p>
@@ -294,7 +294,7 @@
     </p:spTree>
     <p:extLst>
       <p:ext uri="{BB962C8B-B14F-4D97-AF65-F5344CB8AC3E}">
-        <p14:creationId xmlns:p14="http://schemas.microsoft.com/office/powerpoint/2010/main" val="872222591"/>
+        <p14:creationId xmlns:p14="http://schemas.microsoft.com/office/powerpoint/2010/main" val="1088683528"/>
       </p:ext>
     </p:extLst>
   </p:cSld>
@@ -413,7 +413,7 @@
           <a:p>
             <a:fld id="{ED160DB6-C0DC-8946-AD05-C0754294CFDE}" type="datetimeFigureOut">
               <a:rPr lang="fr-FR" smtClean="0"/>
-              <a:t>25/06/2025</a:t>
+              <a:t>17/07/2025</a:t>
             </a:fld>
             <a:endParaRPr lang="fr-FR"/>
           </a:p>
@@ -464,7 +464,7 @@
     </p:spTree>
     <p:extLst>
       <p:ext uri="{BB962C8B-B14F-4D97-AF65-F5344CB8AC3E}">
-        <p14:creationId xmlns:p14="http://schemas.microsoft.com/office/powerpoint/2010/main" val="1130549935"/>
+        <p14:creationId xmlns:p14="http://schemas.microsoft.com/office/powerpoint/2010/main" val="3932706428"/>
       </p:ext>
     </p:extLst>
   </p:cSld>
@@ -503,8 +503,8 @@
         </p:nvSpPr>
         <p:spPr>
           <a:xfrm>
-            <a:off x="4379491" y="99649"/>
-            <a:ext cx="1319585" cy="1586148"/>
+            <a:off x="2190314" y="86210"/>
+            <a:ext cx="659963" cy="1372240"/>
           </a:xfrm>
         </p:spPr>
         <p:txBody>
@@ -531,8 +531,8 @@
         </p:nvSpPr>
         <p:spPr>
           <a:xfrm>
-            <a:off x="420737" y="99649"/>
-            <a:ext cx="3882256" cy="1586148"/>
+            <a:off x="210423" y="86210"/>
+            <a:ext cx="1941632" cy="1372240"/>
           </a:xfrm>
         </p:spPr>
         <p:txBody>
@@ -593,7 +593,7 @@
           <a:p>
             <a:fld id="{ED160DB6-C0DC-8946-AD05-C0754294CFDE}" type="datetimeFigureOut">
               <a:rPr lang="fr-FR" smtClean="0"/>
-              <a:t>25/06/2025</a:t>
+              <a:t>17/07/2025</a:t>
             </a:fld>
             <a:endParaRPr lang="fr-FR"/>
           </a:p>
@@ -644,7 +644,7 @@
     </p:spTree>
     <p:extLst>
       <p:ext uri="{BB962C8B-B14F-4D97-AF65-F5344CB8AC3E}">
-        <p14:creationId xmlns:p14="http://schemas.microsoft.com/office/powerpoint/2010/main" val="3182282383"/>
+        <p14:creationId xmlns:p14="http://schemas.microsoft.com/office/powerpoint/2010/main" val="3228330337"/>
       </p:ext>
     </p:extLst>
   </p:cSld>
@@ -763,7 +763,7 @@
           <a:p>
             <a:fld id="{ED160DB6-C0DC-8946-AD05-C0754294CFDE}" type="datetimeFigureOut">
               <a:rPr lang="fr-FR" smtClean="0"/>
-              <a:t>25/06/2025</a:t>
+              <a:t>17/07/2025</a:t>
             </a:fld>
             <a:endParaRPr lang="fr-FR"/>
           </a:p>
@@ -814,7 +814,7 @@
     </p:spTree>
     <p:extLst>
       <p:ext uri="{BB962C8B-B14F-4D97-AF65-F5344CB8AC3E}">
-        <p14:creationId xmlns:p14="http://schemas.microsoft.com/office/powerpoint/2010/main" val="2272929264"/>
+        <p14:creationId xmlns:p14="http://schemas.microsoft.com/office/powerpoint/2010/main" val="1746121305"/>
       </p:ext>
     </p:extLst>
   </p:cSld>
@@ -853,15 +853,15 @@
         </p:nvSpPr>
         <p:spPr>
           <a:xfrm>
-            <a:off x="417550" y="466616"/>
-            <a:ext cx="5278339" cy="778560"/>
+            <a:off x="208829" y="403688"/>
+            <a:ext cx="2639854" cy="673563"/>
           </a:xfrm>
         </p:spPr>
         <p:txBody>
           <a:bodyPr anchor="b"/>
           <a:lstStyle>
             <a:lvl1pPr>
-              <a:defRPr sz="1637"/>
+              <a:defRPr sz="1417"/>
             </a:lvl1pPr>
           </a:lstStyle>
           <a:p>
@@ -885,8 +885,8 @@
         </p:nvSpPr>
         <p:spPr>
           <a:xfrm>
-            <a:off x="417550" y="1252541"/>
-            <a:ext cx="5278339" cy="409426"/>
+            <a:off x="208829" y="1083623"/>
+            <a:ext cx="2639854" cy="354211"/>
           </a:xfrm>
         </p:spPr>
         <p:txBody>
@@ -894,7 +894,7 @@
           <a:lstStyle>
             <a:lvl1pPr marL="0" indent="0">
               <a:buNone/>
-              <a:defRPr sz="655">
+              <a:defRPr sz="567">
                 <a:solidFill>
                   <a:schemeClr val="tx1">
                     <a:tint val="75000"/>
@@ -902,9 +902,9 @@
                 </a:solidFill>
               </a:defRPr>
             </a:lvl1pPr>
-            <a:lvl2pPr marL="124770" indent="0">
-              <a:buNone/>
-              <a:defRPr sz="546">
+            <a:lvl2pPr marL="107945" indent="0">
+              <a:buNone/>
+              <a:defRPr sz="472">
                 <a:solidFill>
                   <a:schemeClr val="tx1">
                     <a:tint val="75000"/>
@@ -912,9 +912,9 @@
                 </a:solidFill>
               </a:defRPr>
             </a:lvl2pPr>
-            <a:lvl3pPr marL="249540" indent="0">
-              <a:buNone/>
-              <a:defRPr sz="491">
+            <a:lvl3pPr marL="215890" indent="0">
+              <a:buNone/>
+              <a:defRPr sz="425">
                 <a:solidFill>
                   <a:schemeClr val="tx1">
                     <a:tint val="75000"/>
@@ -922,9 +922,9 @@
                 </a:solidFill>
               </a:defRPr>
             </a:lvl3pPr>
-            <a:lvl4pPr marL="374310" indent="0">
-              <a:buNone/>
-              <a:defRPr sz="437">
+            <a:lvl4pPr marL="323835" indent="0">
+              <a:buNone/>
+              <a:defRPr sz="378">
                 <a:solidFill>
                   <a:schemeClr val="tx1">
                     <a:tint val="75000"/>
@@ -932,9 +932,9 @@
                 </a:solidFill>
               </a:defRPr>
             </a:lvl4pPr>
-            <a:lvl5pPr marL="499080" indent="0">
-              <a:buNone/>
-              <a:defRPr sz="437">
+            <a:lvl5pPr marL="431780" indent="0">
+              <a:buNone/>
+              <a:defRPr sz="378">
                 <a:solidFill>
                   <a:schemeClr val="tx1">
                     <a:tint val="75000"/>
@@ -942,9 +942,9 @@
                 </a:solidFill>
               </a:defRPr>
             </a:lvl5pPr>
-            <a:lvl6pPr marL="623849" indent="0">
-              <a:buNone/>
-              <a:defRPr sz="437">
+            <a:lvl6pPr marL="539725" indent="0">
+              <a:buNone/>
+              <a:defRPr sz="378">
                 <a:solidFill>
                   <a:schemeClr val="tx1">
                     <a:tint val="75000"/>
@@ -952,9 +952,9 @@
                 </a:solidFill>
               </a:defRPr>
             </a:lvl6pPr>
-            <a:lvl7pPr marL="748619" indent="0">
-              <a:buNone/>
-              <a:defRPr sz="437">
+            <a:lvl7pPr marL="647670" indent="0">
+              <a:buNone/>
+              <a:defRPr sz="378">
                 <a:solidFill>
                   <a:schemeClr val="tx1">
                     <a:tint val="75000"/>
@@ -962,9 +962,9 @@
                 </a:solidFill>
               </a:defRPr>
             </a:lvl7pPr>
-            <a:lvl8pPr marL="873389" indent="0">
-              <a:buNone/>
-              <a:defRPr sz="437">
+            <a:lvl8pPr marL="755614" indent="0">
+              <a:buNone/>
+              <a:defRPr sz="378">
                 <a:solidFill>
                   <a:schemeClr val="tx1">
                     <a:tint val="75000"/>
@@ -972,9 +972,9 @@
                 </a:solidFill>
               </a:defRPr>
             </a:lvl8pPr>
-            <a:lvl9pPr marL="998159" indent="0">
-              <a:buNone/>
-              <a:defRPr sz="437">
+            <a:lvl9pPr marL="863559" indent="0">
+              <a:buNone/>
+              <a:defRPr sz="378">
                 <a:solidFill>
                   <a:schemeClr val="tx1">
                     <a:tint val="75000"/>
@@ -1009,7 +1009,7 @@
           <a:p>
             <a:fld id="{ED160DB6-C0DC-8946-AD05-C0754294CFDE}" type="datetimeFigureOut">
               <a:rPr lang="fr-FR" smtClean="0"/>
-              <a:t>25/06/2025</a:t>
+              <a:t>17/07/2025</a:t>
             </a:fld>
             <a:endParaRPr lang="fr-FR"/>
           </a:p>
@@ -1060,7 +1060,7 @@
     </p:spTree>
     <p:extLst>
       <p:ext uri="{BB962C8B-B14F-4D97-AF65-F5344CB8AC3E}">
-        <p14:creationId xmlns:p14="http://schemas.microsoft.com/office/powerpoint/2010/main" val="1593283992"/>
+        <p14:creationId xmlns:p14="http://schemas.microsoft.com/office/powerpoint/2010/main" val="2190638694"/>
       </p:ext>
     </p:extLst>
   </p:cSld>
@@ -1122,8 +1122,8 @@
         </p:nvSpPr>
         <p:spPr>
           <a:xfrm>
-            <a:off x="420737" y="498244"/>
-            <a:ext cx="2600921" cy="1187553"/>
+            <a:off x="210423" y="431050"/>
+            <a:ext cx="1300798" cy="1027399"/>
           </a:xfrm>
         </p:spPr>
         <p:txBody>
@@ -1179,8 +1179,8 @@
         </p:nvSpPr>
         <p:spPr>
           <a:xfrm>
-            <a:off x="3098155" y="498244"/>
-            <a:ext cx="2600921" cy="1187553"/>
+            <a:off x="1549479" y="431050"/>
+            <a:ext cx="1300798" cy="1027399"/>
           </a:xfrm>
         </p:spPr>
         <p:txBody>
@@ -1241,7 +1241,7 @@
           <a:p>
             <a:fld id="{ED160DB6-C0DC-8946-AD05-C0754294CFDE}" type="datetimeFigureOut">
               <a:rPr lang="fr-FR" smtClean="0"/>
-              <a:t>25/06/2025</a:t>
+              <a:t>17/07/2025</a:t>
             </a:fld>
             <a:endParaRPr lang="fr-FR"/>
           </a:p>
@@ -1292,7 +1292,7 @@
     </p:spTree>
     <p:extLst>
       <p:ext uri="{BB962C8B-B14F-4D97-AF65-F5344CB8AC3E}">
-        <p14:creationId xmlns:p14="http://schemas.microsoft.com/office/powerpoint/2010/main" val="4244665248"/>
+        <p14:creationId xmlns:p14="http://schemas.microsoft.com/office/powerpoint/2010/main" val="1968089501"/>
       </p:ext>
     </p:extLst>
   </p:cSld>
@@ -1331,8 +1331,8 @@
         </p:nvSpPr>
         <p:spPr>
           <a:xfrm>
-            <a:off x="421534" y="99649"/>
-            <a:ext cx="5278339" cy="361768"/>
+            <a:off x="210822" y="86210"/>
+            <a:ext cx="2639854" cy="312980"/>
           </a:xfrm>
         </p:spPr>
         <p:txBody>
@@ -1359,8 +1359,8 @@
         </p:nvSpPr>
         <p:spPr>
           <a:xfrm>
-            <a:off x="421534" y="458818"/>
-            <a:ext cx="2588968" cy="224859"/>
+            <a:off x="210822" y="396941"/>
+            <a:ext cx="1294819" cy="194535"/>
           </a:xfrm>
         </p:spPr>
         <p:txBody>
@@ -1368,39 +1368,39 @@
           <a:lstStyle>
             <a:lvl1pPr marL="0" indent="0">
               <a:buNone/>
-              <a:defRPr sz="655" b="1"/>
+              <a:defRPr sz="567" b="1"/>
             </a:lvl1pPr>
-            <a:lvl2pPr marL="124770" indent="0">
-              <a:buNone/>
-              <a:defRPr sz="546" b="1"/>
+            <a:lvl2pPr marL="107945" indent="0">
+              <a:buNone/>
+              <a:defRPr sz="472" b="1"/>
             </a:lvl2pPr>
-            <a:lvl3pPr marL="249540" indent="0">
-              <a:buNone/>
-              <a:defRPr sz="491" b="1"/>
+            <a:lvl3pPr marL="215890" indent="0">
+              <a:buNone/>
+              <a:defRPr sz="425" b="1"/>
             </a:lvl3pPr>
-            <a:lvl4pPr marL="374310" indent="0">
-              <a:buNone/>
-              <a:defRPr sz="437" b="1"/>
+            <a:lvl4pPr marL="323835" indent="0">
+              <a:buNone/>
+              <a:defRPr sz="378" b="1"/>
             </a:lvl4pPr>
-            <a:lvl5pPr marL="499080" indent="0">
-              <a:buNone/>
-              <a:defRPr sz="437" b="1"/>
+            <a:lvl5pPr marL="431780" indent="0">
+              <a:buNone/>
+              <a:defRPr sz="378" b="1"/>
             </a:lvl5pPr>
-            <a:lvl6pPr marL="623849" indent="0">
-              <a:buNone/>
-              <a:defRPr sz="437" b="1"/>
+            <a:lvl6pPr marL="539725" indent="0">
+              <a:buNone/>
+              <a:defRPr sz="378" b="1"/>
             </a:lvl6pPr>
-            <a:lvl7pPr marL="748619" indent="0">
-              <a:buNone/>
-              <a:defRPr sz="437" b="1"/>
+            <a:lvl7pPr marL="647670" indent="0">
+              <a:buNone/>
+              <a:defRPr sz="378" b="1"/>
             </a:lvl7pPr>
-            <a:lvl8pPr marL="873389" indent="0">
-              <a:buNone/>
-              <a:defRPr sz="437" b="1"/>
+            <a:lvl8pPr marL="755614" indent="0">
+              <a:buNone/>
+              <a:defRPr sz="378" b="1"/>
             </a:lvl8pPr>
-            <a:lvl9pPr marL="998159" indent="0">
-              <a:buNone/>
-              <a:defRPr sz="437" b="1"/>
+            <a:lvl9pPr marL="863559" indent="0">
+              <a:buNone/>
+              <a:defRPr sz="378" b="1"/>
             </a:lvl9pPr>
           </a:lstStyle>
           <a:p>
@@ -1424,8 +1424,8 @@
         </p:nvSpPr>
         <p:spPr>
           <a:xfrm>
-            <a:off x="421534" y="683677"/>
-            <a:ext cx="2588968" cy="1005586"/>
+            <a:off x="210822" y="591476"/>
+            <a:ext cx="1294819" cy="869972"/>
           </a:xfrm>
         </p:spPr>
         <p:txBody>
@@ -1481,8 +1481,8 @@
         </p:nvSpPr>
         <p:spPr>
           <a:xfrm>
-            <a:off x="3098155" y="458818"/>
-            <a:ext cx="2601718" cy="224859"/>
+            <a:off x="1549479" y="396941"/>
+            <a:ext cx="1301196" cy="194535"/>
           </a:xfrm>
         </p:spPr>
         <p:txBody>
@@ -1490,39 +1490,39 @@
           <a:lstStyle>
             <a:lvl1pPr marL="0" indent="0">
               <a:buNone/>
-              <a:defRPr sz="655" b="1"/>
+              <a:defRPr sz="567" b="1"/>
             </a:lvl1pPr>
-            <a:lvl2pPr marL="124770" indent="0">
-              <a:buNone/>
-              <a:defRPr sz="546" b="1"/>
+            <a:lvl2pPr marL="107945" indent="0">
+              <a:buNone/>
+              <a:defRPr sz="472" b="1"/>
             </a:lvl2pPr>
-            <a:lvl3pPr marL="249540" indent="0">
-              <a:buNone/>
-              <a:defRPr sz="491" b="1"/>
+            <a:lvl3pPr marL="215890" indent="0">
+              <a:buNone/>
+              <a:defRPr sz="425" b="1"/>
             </a:lvl3pPr>
-            <a:lvl4pPr marL="374310" indent="0">
-              <a:buNone/>
-              <a:defRPr sz="437" b="1"/>
+            <a:lvl4pPr marL="323835" indent="0">
+              <a:buNone/>
+              <a:defRPr sz="378" b="1"/>
             </a:lvl4pPr>
-            <a:lvl5pPr marL="499080" indent="0">
-              <a:buNone/>
-              <a:defRPr sz="437" b="1"/>
+            <a:lvl5pPr marL="431780" indent="0">
+              <a:buNone/>
+              <a:defRPr sz="378" b="1"/>
             </a:lvl5pPr>
-            <a:lvl6pPr marL="623849" indent="0">
-              <a:buNone/>
-              <a:defRPr sz="437" b="1"/>
+            <a:lvl6pPr marL="539725" indent="0">
+              <a:buNone/>
+              <a:defRPr sz="378" b="1"/>
             </a:lvl6pPr>
-            <a:lvl7pPr marL="748619" indent="0">
-              <a:buNone/>
-              <a:defRPr sz="437" b="1"/>
+            <a:lvl7pPr marL="647670" indent="0">
+              <a:buNone/>
+              <a:defRPr sz="378" b="1"/>
             </a:lvl7pPr>
-            <a:lvl8pPr marL="873389" indent="0">
-              <a:buNone/>
-              <a:defRPr sz="437" b="1"/>
+            <a:lvl8pPr marL="755614" indent="0">
+              <a:buNone/>
+              <a:defRPr sz="378" b="1"/>
             </a:lvl8pPr>
-            <a:lvl9pPr marL="998159" indent="0">
-              <a:buNone/>
-              <a:defRPr sz="437" b="1"/>
+            <a:lvl9pPr marL="863559" indent="0">
+              <a:buNone/>
+              <a:defRPr sz="378" b="1"/>
             </a:lvl9pPr>
           </a:lstStyle>
           <a:p>
@@ -1546,8 +1546,8 @@
         </p:nvSpPr>
         <p:spPr>
           <a:xfrm>
-            <a:off x="3098155" y="683677"/>
-            <a:ext cx="2601718" cy="1005586"/>
+            <a:off x="1549479" y="591476"/>
+            <a:ext cx="1301196" cy="869972"/>
           </a:xfrm>
         </p:spPr>
         <p:txBody>
@@ -1608,7 +1608,7 @@
           <a:p>
             <a:fld id="{ED160DB6-C0DC-8946-AD05-C0754294CFDE}" type="datetimeFigureOut">
               <a:rPr lang="fr-FR" smtClean="0"/>
-              <a:t>25/06/2025</a:t>
+              <a:t>17/07/2025</a:t>
             </a:fld>
             <a:endParaRPr lang="fr-FR"/>
           </a:p>
@@ -1659,7 +1659,7 @@
     </p:spTree>
     <p:extLst>
       <p:ext uri="{BB962C8B-B14F-4D97-AF65-F5344CB8AC3E}">
-        <p14:creationId xmlns:p14="http://schemas.microsoft.com/office/powerpoint/2010/main" val="3009412218"/>
+        <p14:creationId xmlns:p14="http://schemas.microsoft.com/office/powerpoint/2010/main" val="2516343087"/>
       </p:ext>
     </p:extLst>
   </p:cSld>
@@ -1726,7 +1726,7 @@
           <a:p>
             <a:fld id="{ED160DB6-C0DC-8946-AD05-C0754294CFDE}" type="datetimeFigureOut">
               <a:rPr lang="fr-FR" smtClean="0"/>
-              <a:t>25/06/2025</a:t>
+              <a:t>17/07/2025</a:t>
             </a:fld>
             <a:endParaRPr lang="fr-FR"/>
           </a:p>
@@ -1777,7 +1777,7 @@
     </p:spTree>
     <p:extLst>
       <p:ext uri="{BB962C8B-B14F-4D97-AF65-F5344CB8AC3E}">
-        <p14:creationId xmlns:p14="http://schemas.microsoft.com/office/powerpoint/2010/main" val="1363750941"/>
+        <p14:creationId xmlns:p14="http://schemas.microsoft.com/office/powerpoint/2010/main" val="169900876"/>
       </p:ext>
     </p:extLst>
   </p:cSld>
@@ -1821,7 +1821,7 @@
           <a:p>
             <a:fld id="{ED160DB6-C0DC-8946-AD05-C0754294CFDE}" type="datetimeFigureOut">
               <a:rPr lang="fr-FR" smtClean="0"/>
-              <a:t>25/06/2025</a:t>
+              <a:t>17/07/2025</a:t>
             </a:fld>
             <a:endParaRPr lang="fr-FR"/>
           </a:p>
@@ -1872,7 +1872,7 @@
     </p:spTree>
     <p:extLst>
       <p:ext uri="{BB962C8B-B14F-4D97-AF65-F5344CB8AC3E}">
-        <p14:creationId xmlns:p14="http://schemas.microsoft.com/office/powerpoint/2010/main" val="1831205921"/>
+        <p14:creationId xmlns:p14="http://schemas.microsoft.com/office/powerpoint/2010/main" val="4017543199"/>
       </p:ext>
     </p:extLst>
   </p:cSld>
@@ -1911,15 +1911,15 @@
         </p:nvSpPr>
         <p:spPr>
           <a:xfrm>
-            <a:off x="421534" y="124778"/>
-            <a:ext cx="1973799" cy="436721"/>
+            <a:off x="210822" y="107950"/>
+            <a:ext cx="987155" cy="377825"/>
           </a:xfrm>
         </p:spPr>
         <p:txBody>
           <a:bodyPr anchor="b"/>
           <a:lstStyle>
             <a:lvl1pPr>
-              <a:defRPr sz="873"/>
+              <a:defRPr sz="756"/>
             </a:lvl1pPr>
           </a:lstStyle>
           <a:p>
@@ -1943,39 +1943,39 @@
         </p:nvSpPr>
         <p:spPr>
           <a:xfrm>
-            <a:off x="2601718" y="269485"/>
-            <a:ext cx="3098155" cy="1330094"/>
+            <a:off x="1301196" y="233142"/>
+            <a:ext cx="1549479" cy="1150717"/>
           </a:xfrm>
         </p:spPr>
         <p:txBody>
           <a:bodyPr/>
           <a:lstStyle>
             <a:lvl1pPr>
-              <a:defRPr sz="873"/>
+              <a:defRPr sz="756"/>
             </a:lvl1pPr>
             <a:lvl2pPr>
-              <a:defRPr sz="764"/>
+              <a:defRPr sz="661"/>
             </a:lvl2pPr>
             <a:lvl3pPr>
-              <a:defRPr sz="655"/>
+              <a:defRPr sz="567"/>
             </a:lvl3pPr>
             <a:lvl4pPr>
-              <a:defRPr sz="546"/>
+              <a:defRPr sz="472"/>
             </a:lvl4pPr>
             <a:lvl5pPr>
-              <a:defRPr sz="546"/>
+              <a:defRPr sz="472"/>
             </a:lvl5pPr>
             <a:lvl6pPr>
-              <a:defRPr sz="546"/>
+              <a:defRPr sz="472"/>
             </a:lvl6pPr>
             <a:lvl7pPr>
-              <a:defRPr sz="546"/>
+              <a:defRPr sz="472"/>
             </a:lvl7pPr>
             <a:lvl8pPr>
-              <a:defRPr sz="546"/>
+              <a:defRPr sz="472"/>
             </a:lvl8pPr>
             <a:lvl9pPr>
-              <a:defRPr sz="546"/>
+              <a:defRPr sz="472"/>
             </a:lvl9pPr>
           </a:lstStyle>
           <a:p>
@@ -2028,8 +2028,8 @@
         </p:nvSpPr>
         <p:spPr>
           <a:xfrm>
-            <a:off x="421534" y="561499"/>
-            <a:ext cx="1973799" cy="1040246"/>
+            <a:off x="210822" y="485775"/>
+            <a:ext cx="987155" cy="899958"/>
           </a:xfrm>
         </p:spPr>
         <p:txBody>
@@ -2037,39 +2037,39 @@
           <a:lstStyle>
             <a:lvl1pPr marL="0" indent="0">
               <a:buNone/>
-              <a:defRPr sz="437"/>
+              <a:defRPr sz="378"/>
             </a:lvl1pPr>
-            <a:lvl2pPr marL="124770" indent="0">
-              <a:buNone/>
-              <a:defRPr sz="382"/>
+            <a:lvl2pPr marL="107945" indent="0">
+              <a:buNone/>
+              <a:defRPr sz="331"/>
             </a:lvl2pPr>
-            <a:lvl3pPr marL="249540" indent="0">
-              <a:buNone/>
-              <a:defRPr sz="327"/>
+            <a:lvl3pPr marL="215890" indent="0">
+              <a:buNone/>
+              <a:defRPr sz="283"/>
             </a:lvl3pPr>
-            <a:lvl4pPr marL="374310" indent="0">
-              <a:buNone/>
-              <a:defRPr sz="273"/>
+            <a:lvl4pPr marL="323835" indent="0">
+              <a:buNone/>
+              <a:defRPr sz="236"/>
             </a:lvl4pPr>
-            <a:lvl5pPr marL="499080" indent="0">
-              <a:buNone/>
-              <a:defRPr sz="273"/>
+            <a:lvl5pPr marL="431780" indent="0">
+              <a:buNone/>
+              <a:defRPr sz="236"/>
             </a:lvl5pPr>
-            <a:lvl6pPr marL="623849" indent="0">
-              <a:buNone/>
-              <a:defRPr sz="273"/>
+            <a:lvl6pPr marL="539725" indent="0">
+              <a:buNone/>
+              <a:defRPr sz="236"/>
             </a:lvl6pPr>
-            <a:lvl7pPr marL="748619" indent="0">
-              <a:buNone/>
-              <a:defRPr sz="273"/>
+            <a:lvl7pPr marL="647670" indent="0">
+              <a:buNone/>
+              <a:defRPr sz="236"/>
             </a:lvl7pPr>
-            <a:lvl8pPr marL="873389" indent="0">
-              <a:buNone/>
-              <a:defRPr sz="273"/>
+            <a:lvl8pPr marL="755614" indent="0">
+              <a:buNone/>
+              <a:defRPr sz="236"/>
             </a:lvl8pPr>
-            <a:lvl9pPr marL="998159" indent="0">
-              <a:buNone/>
-              <a:defRPr sz="273"/>
+            <a:lvl9pPr marL="863559" indent="0">
+              <a:buNone/>
+              <a:defRPr sz="236"/>
             </a:lvl9pPr>
           </a:lstStyle>
           <a:p>
@@ -2098,7 +2098,7 @@
           <a:p>
             <a:fld id="{ED160DB6-C0DC-8946-AD05-C0754294CFDE}" type="datetimeFigureOut">
               <a:rPr lang="fr-FR" smtClean="0"/>
-              <a:t>25/06/2025</a:t>
+              <a:t>17/07/2025</a:t>
             </a:fld>
             <a:endParaRPr lang="fr-FR"/>
           </a:p>
@@ -2149,7 +2149,7 @@
     </p:spTree>
     <p:extLst>
       <p:ext uri="{BB962C8B-B14F-4D97-AF65-F5344CB8AC3E}">
-        <p14:creationId xmlns:p14="http://schemas.microsoft.com/office/powerpoint/2010/main" val="558180917"/>
+        <p14:creationId xmlns:p14="http://schemas.microsoft.com/office/powerpoint/2010/main" val="26880125"/>
       </p:ext>
     </p:extLst>
   </p:cSld>
@@ -2188,15 +2188,15 @@
         </p:nvSpPr>
         <p:spPr>
           <a:xfrm>
-            <a:off x="421534" y="124778"/>
-            <a:ext cx="1973799" cy="436721"/>
+            <a:off x="210822" y="107950"/>
+            <a:ext cx="987155" cy="377825"/>
           </a:xfrm>
         </p:spPr>
         <p:txBody>
           <a:bodyPr anchor="b"/>
           <a:lstStyle>
             <a:lvl1pPr>
-              <a:defRPr sz="873"/>
+              <a:defRPr sz="756"/>
             </a:lvl1pPr>
           </a:lstStyle>
           <a:p>
@@ -2220,8 +2220,8 @@
         </p:nvSpPr>
         <p:spPr>
           <a:xfrm>
-            <a:off x="2601718" y="269485"/>
-            <a:ext cx="3098155" cy="1330094"/>
+            <a:off x="1301196" y="233142"/>
+            <a:ext cx="1549479" cy="1150717"/>
           </a:xfrm>
         </p:spPr>
         <p:txBody>
@@ -2229,39 +2229,39 @@
           <a:lstStyle>
             <a:lvl1pPr marL="0" indent="0">
               <a:buNone/>
-              <a:defRPr sz="873"/>
+              <a:defRPr sz="756"/>
             </a:lvl1pPr>
-            <a:lvl2pPr marL="124770" indent="0">
-              <a:buNone/>
-              <a:defRPr sz="764"/>
+            <a:lvl2pPr marL="107945" indent="0">
+              <a:buNone/>
+              <a:defRPr sz="661"/>
             </a:lvl2pPr>
-            <a:lvl3pPr marL="249540" indent="0">
-              <a:buNone/>
-              <a:defRPr sz="655"/>
+            <a:lvl3pPr marL="215890" indent="0">
+              <a:buNone/>
+              <a:defRPr sz="567"/>
             </a:lvl3pPr>
-            <a:lvl4pPr marL="374310" indent="0">
-              <a:buNone/>
-              <a:defRPr sz="546"/>
+            <a:lvl4pPr marL="323835" indent="0">
+              <a:buNone/>
+              <a:defRPr sz="472"/>
             </a:lvl4pPr>
-            <a:lvl5pPr marL="499080" indent="0">
-              <a:buNone/>
-              <a:defRPr sz="546"/>
+            <a:lvl5pPr marL="431780" indent="0">
+              <a:buNone/>
+              <a:defRPr sz="472"/>
             </a:lvl5pPr>
-            <a:lvl6pPr marL="623849" indent="0">
-              <a:buNone/>
-              <a:defRPr sz="546"/>
+            <a:lvl6pPr marL="539725" indent="0">
+              <a:buNone/>
+              <a:defRPr sz="472"/>
             </a:lvl6pPr>
-            <a:lvl7pPr marL="748619" indent="0">
-              <a:buNone/>
-              <a:defRPr sz="546"/>
+            <a:lvl7pPr marL="647670" indent="0">
+              <a:buNone/>
+              <a:defRPr sz="472"/>
             </a:lvl7pPr>
-            <a:lvl8pPr marL="873389" indent="0">
-              <a:buNone/>
-              <a:defRPr sz="546"/>
+            <a:lvl8pPr marL="755614" indent="0">
+              <a:buNone/>
+              <a:defRPr sz="472"/>
             </a:lvl8pPr>
-            <a:lvl9pPr marL="998159" indent="0">
-              <a:buNone/>
-              <a:defRPr sz="546"/>
+            <a:lvl9pPr marL="863559" indent="0">
+              <a:buNone/>
+              <a:defRPr sz="472"/>
             </a:lvl9pPr>
           </a:lstStyle>
           <a:p>
@@ -2285,8 +2285,8 @@
         </p:nvSpPr>
         <p:spPr>
           <a:xfrm>
-            <a:off x="421534" y="561499"/>
-            <a:ext cx="1973799" cy="1040246"/>
+            <a:off x="210822" y="485775"/>
+            <a:ext cx="987155" cy="899958"/>
           </a:xfrm>
         </p:spPr>
         <p:txBody>
@@ -2294,39 +2294,39 @@
           <a:lstStyle>
             <a:lvl1pPr marL="0" indent="0">
               <a:buNone/>
-              <a:defRPr sz="437"/>
+              <a:defRPr sz="378"/>
             </a:lvl1pPr>
-            <a:lvl2pPr marL="124770" indent="0">
-              <a:buNone/>
-              <a:defRPr sz="382"/>
+            <a:lvl2pPr marL="107945" indent="0">
+              <a:buNone/>
+              <a:defRPr sz="331"/>
             </a:lvl2pPr>
-            <a:lvl3pPr marL="249540" indent="0">
-              <a:buNone/>
-              <a:defRPr sz="327"/>
+            <a:lvl3pPr marL="215890" indent="0">
+              <a:buNone/>
+              <a:defRPr sz="283"/>
             </a:lvl3pPr>
-            <a:lvl4pPr marL="374310" indent="0">
-              <a:buNone/>
-              <a:defRPr sz="273"/>
+            <a:lvl4pPr marL="323835" indent="0">
+              <a:buNone/>
+              <a:defRPr sz="236"/>
             </a:lvl4pPr>
-            <a:lvl5pPr marL="499080" indent="0">
-              <a:buNone/>
-              <a:defRPr sz="273"/>
+            <a:lvl5pPr marL="431780" indent="0">
+              <a:buNone/>
+              <a:defRPr sz="236"/>
             </a:lvl5pPr>
-            <a:lvl6pPr marL="623849" indent="0">
-              <a:buNone/>
-              <a:defRPr sz="273"/>
+            <a:lvl6pPr marL="539725" indent="0">
+              <a:buNone/>
+              <a:defRPr sz="236"/>
             </a:lvl6pPr>
-            <a:lvl7pPr marL="748619" indent="0">
-              <a:buNone/>
-              <a:defRPr sz="273"/>
+            <a:lvl7pPr marL="647670" indent="0">
+              <a:buNone/>
+              <a:defRPr sz="236"/>
             </a:lvl7pPr>
-            <a:lvl8pPr marL="873389" indent="0">
-              <a:buNone/>
-              <a:defRPr sz="273"/>
+            <a:lvl8pPr marL="755614" indent="0">
+              <a:buNone/>
+              <a:defRPr sz="236"/>
             </a:lvl8pPr>
-            <a:lvl9pPr marL="998159" indent="0">
-              <a:buNone/>
-              <a:defRPr sz="273"/>
+            <a:lvl9pPr marL="863559" indent="0">
+              <a:buNone/>
+              <a:defRPr sz="236"/>
             </a:lvl9pPr>
           </a:lstStyle>
           <a:p>
@@ -2355,7 +2355,7 @@
           <a:p>
             <a:fld id="{ED160DB6-C0DC-8946-AD05-C0754294CFDE}" type="datetimeFigureOut">
               <a:rPr lang="fr-FR" smtClean="0"/>
-              <a:t>25/06/2025</a:t>
+              <a:t>17/07/2025</a:t>
             </a:fld>
             <a:endParaRPr lang="fr-FR"/>
           </a:p>
@@ -2406,7 +2406,7 @@
     </p:spTree>
     <p:extLst>
       <p:ext uri="{BB962C8B-B14F-4D97-AF65-F5344CB8AC3E}">
-        <p14:creationId xmlns:p14="http://schemas.microsoft.com/office/powerpoint/2010/main" val="1170189041"/>
+        <p14:creationId xmlns:p14="http://schemas.microsoft.com/office/powerpoint/2010/main" val="3017208800"/>
       </p:ext>
     </p:extLst>
   </p:cSld>
@@ -2450,8 +2450,8 @@
         </p:nvSpPr>
         <p:spPr>
           <a:xfrm>
-            <a:off x="420737" y="99649"/>
-            <a:ext cx="5278339" cy="361768"/>
+            <a:off x="210423" y="86210"/>
+            <a:ext cx="2639854" cy="312980"/>
           </a:xfrm>
           <a:prstGeom prst="rect">
             <a:avLst/>
@@ -2483,8 +2483,8 @@
         </p:nvSpPr>
         <p:spPr>
           <a:xfrm>
-            <a:off x="420737" y="498244"/>
-            <a:ext cx="5278339" cy="1187553"/>
+            <a:off x="210423" y="431050"/>
+            <a:ext cx="2639854" cy="1027399"/>
           </a:xfrm>
           <a:prstGeom prst="rect">
             <a:avLst/>
@@ -2545,8 +2545,8 @@
         </p:nvSpPr>
         <p:spPr>
           <a:xfrm>
-            <a:off x="420737" y="1734754"/>
-            <a:ext cx="1376958" cy="99649"/>
+            <a:off x="210423" y="1500805"/>
+            <a:ext cx="688658" cy="86210"/>
           </a:xfrm>
           <a:prstGeom prst="rect">
             <a:avLst/>
@@ -2556,7 +2556,7 @@
           <a:bodyPr vert="horz" lIns="91440" tIns="45720" rIns="91440" bIns="45720" rtlCol="0" anchor="ctr"/>
           <a:lstStyle>
             <a:lvl1pPr algn="l">
-              <a:defRPr sz="327">
+              <a:defRPr sz="283">
                 <a:solidFill>
                   <a:schemeClr val="tx1">
                     <a:tint val="75000"/>
@@ -2568,7 +2568,7 @@
           <a:p>
             <a:fld id="{ED160DB6-C0DC-8946-AD05-C0754294CFDE}" type="datetimeFigureOut">
               <a:rPr lang="fr-FR" smtClean="0"/>
-              <a:t>25/06/2025</a:t>
+              <a:t>17/07/2025</a:t>
             </a:fld>
             <a:endParaRPr lang="fr-FR"/>
           </a:p>
@@ -2586,8 +2586,8 @@
         </p:nvSpPr>
         <p:spPr>
           <a:xfrm>
-            <a:off x="2027188" y="1734754"/>
-            <a:ext cx="2065437" cy="99649"/>
+            <a:off x="1013857" y="1500805"/>
+            <a:ext cx="1032986" cy="86210"/>
           </a:xfrm>
           <a:prstGeom prst="rect">
             <a:avLst/>
@@ -2597,7 +2597,7 @@
           <a:bodyPr vert="horz" lIns="91440" tIns="45720" rIns="91440" bIns="45720" rtlCol="0" anchor="ctr"/>
           <a:lstStyle>
             <a:lvl1pPr algn="ctr">
-              <a:defRPr sz="327">
+              <a:defRPr sz="283">
                 <a:solidFill>
                   <a:schemeClr val="tx1">
                     <a:tint val="75000"/>
@@ -2623,8 +2623,8 @@
         </p:nvSpPr>
         <p:spPr>
           <a:xfrm>
-            <a:off x="4322118" y="1734754"/>
-            <a:ext cx="1376958" cy="99649"/>
+            <a:off x="2161619" y="1500805"/>
+            <a:ext cx="688658" cy="86210"/>
           </a:xfrm>
           <a:prstGeom prst="rect">
             <a:avLst/>
@@ -2634,7 +2634,7 @@
           <a:bodyPr vert="horz" lIns="91440" tIns="45720" rIns="91440" bIns="45720" rtlCol="0" anchor="ctr"/>
           <a:lstStyle>
             <a:lvl1pPr algn="r">
-              <a:defRPr sz="327">
+              <a:defRPr sz="283">
                 <a:solidFill>
                   <a:schemeClr val="tx1">
                     <a:tint val="75000"/>
@@ -2655,27 +2655,27 @@
     </p:spTree>
     <p:extLst>
       <p:ext uri="{BB962C8B-B14F-4D97-AF65-F5344CB8AC3E}">
-        <p14:creationId xmlns:p14="http://schemas.microsoft.com/office/powerpoint/2010/main" val="3170911575"/>
+        <p14:creationId xmlns:p14="http://schemas.microsoft.com/office/powerpoint/2010/main" val="1520783126"/>
       </p:ext>
     </p:extLst>
   </p:cSld>
   <p:clrMap bg1="lt1" tx1="dk1" bg2="lt2" tx2="dk2" accent1="accent1" accent2="accent2" accent3="accent3" accent4="accent4" accent5="accent5" accent6="accent6" hlink="hlink" folHlink="folHlink"/>
   <p:sldLayoutIdLst>
-    <p:sldLayoutId id="2147483721" r:id="rId1"/>
-    <p:sldLayoutId id="2147483722" r:id="rId2"/>
-    <p:sldLayoutId id="2147483723" r:id="rId3"/>
-    <p:sldLayoutId id="2147483724" r:id="rId4"/>
-    <p:sldLayoutId id="2147483725" r:id="rId5"/>
-    <p:sldLayoutId id="2147483726" r:id="rId6"/>
-    <p:sldLayoutId id="2147483727" r:id="rId7"/>
-    <p:sldLayoutId id="2147483728" r:id="rId8"/>
-    <p:sldLayoutId id="2147483729" r:id="rId9"/>
-    <p:sldLayoutId id="2147483730" r:id="rId10"/>
-    <p:sldLayoutId id="2147483731" r:id="rId11"/>
+    <p:sldLayoutId id="2147483745" r:id="rId1"/>
+    <p:sldLayoutId id="2147483746" r:id="rId2"/>
+    <p:sldLayoutId id="2147483747" r:id="rId3"/>
+    <p:sldLayoutId id="2147483748" r:id="rId4"/>
+    <p:sldLayoutId id="2147483749" r:id="rId5"/>
+    <p:sldLayoutId id="2147483750" r:id="rId6"/>
+    <p:sldLayoutId id="2147483751" r:id="rId7"/>
+    <p:sldLayoutId id="2147483752" r:id="rId8"/>
+    <p:sldLayoutId id="2147483753" r:id="rId9"/>
+    <p:sldLayoutId id="2147483754" r:id="rId10"/>
+    <p:sldLayoutId id="2147483755" r:id="rId11"/>
   </p:sldLayoutIdLst>
   <p:txStyles>
     <p:titleStyle>
-      <a:lvl1pPr algn="l" defTabSz="249540" rtl="0" eaLnBrk="1" latinLnBrk="0" hangingPunct="1">
+      <a:lvl1pPr algn="l" defTabSz="215890" rtl="0" eaLnBrk="1" latinLnBrk="0" hangingPunct="1">
         <a:lnSpc>
           <a:spcPct val="90000"/>
         </a:lnSpc>
@@ -2683,7 +2683,7 @@
           <a:spcPct val="0"/>
         </a:spcBef>
         <a:buNone/>
-        <a:defRPr sz="1201" kern="1200">
+        <a:defRPr sz="1039" kern="1200">
           <a:solidFill>
             <a:schemeClr val="tx1"/>
           </a:solidFill>
@@ -2694,16 +2694,16 @@
       </a:lvl1pPr>
     </p:titleStyle>
     <p:bodyStyle>
-      <a:lvl1pPr marL="62385" indent="-62385" algn="l" defTabSz="249540" rtl="0" eaLnBrk="1" latinLnBrk="0" hangingPunct="1">
+      <a:lvl1pPr marL="53972" indent="-53972" algn="l" defTabSz="215890" rtl="0" eaLnBrk="1" latinLnBrk="0" hangingPunct="1">
         <a:lnSpc>
           <a:spcPct val="90000"/>
         </a:lnSpc>
         <a:spcBef>
-          <a:spcPts val="273"/>
+          <a:spcPts val="236"/>
         </a:spcBef>
         <a:buFont typeface="Arial" panose="020B0604020202020204" pitchFamily="34" charset="0"/>
         <a:buChar char="•"/>
-        <a:defRPr sz="764" kern="1200">
+        <a:defRPr sz="661" kern="1200">
           <a:solidFill>
             <a:schemeClr val="tx1"/>
           </a:solidFill>
@@ -2712,16 +2712,16 @@
           <a:cs typeface="+mn-cs"/>
         </a:defRPr>
       </a:lvl1pPr>
-      <a:lvl2pPr marL="187155" indent="-62385" algn="l" defTabSz="249540" rtl="0" eaLnBrk="1" latinLnBrk="0" hangingPunct="1">
+      <a:lvl2pPr marL="161917" indent="-53972" algn="l" defTabSz="215890" rtl="0" eaLnBrk="1" latinLnBrk="0" hangingPunct="1">
         <a:lnSpc>
           <a:spcPct val="90000"/>
         </a:lnSpc>
         <a:spcBef>
-          <a:spcPts val="136"/>
+          <a:spcPts val="118"/>
         </a:spcBef>
         <a:buFont typeface="Arial" panose="020B0604020202020204" pitchFamily="34" charset="0"/>
         <a:buChar char="•"/>
-        <a:defRPr sz="655" kern="1200">
+        <a:defRPr sz="567" kern="1200">
           <a:solidFill>
             <a:schemeClr val="tx1"/>
           </a:solidFill>
@@ -2730,16 +2730,16 @@
           <a:cs typeface="+mn-cs"/>
         </a:defRPr>
       </a:lvl2pPr>
-      <a:lvl3pPr marL="311925" indent="-62385" algn="l" defTabSz="249540" rtl="0" eaLnBrk="1" latinLnBrk="0" hangingPunct="1">
+      <a:lvl3pPr marL="269862" indent="-53972" algn="l" defTabSz="215890" rtl="0" eaLnBrk="1" latinLnBrk="0" hangingPunct="1">
         <a:lnSpc>
           <a:spcPct val="90000"/>
         </a:lnSpc>
         <a:spcBef>
-          <a:spcPts val="136"/>
+          <a:spcPts val="118"/>
         </a:spcBef>
         <a:buFont typeface="Arial" panose="020B0604020202020204" pitchFamily="34" charset="0"/>
         <a:buChar char="•"/>
-        <a:defRPr sz="546" kern="1200">
+        <a:defRPr sz="472" kern="1200">
           <a:solidFill>
             <a:schemeClr val="tx1"/>
           </a:solidFill>
@@ -2748,16 +2748,16 @@
           <a:cs typeface="+mn-cs"/>
         </a:defRPr>
       </a:lvl3pPr>
-      <a:lvl4pPr marL="436695" indent="-62385" algn="l" defTabSz="249540" rtl="0" eaLnBrk="1" latinLnBrk="0" hangingPunct="1">
+      <a:lvl4pPr marL="377807" indent="-53972" algn="l" defTabSz="215890" rtl="0" eaLnBrk="1" latinLnBrk="0" hangingPunct="1">
         <a:lnSpc>
           <a:spcPct val="90000"/>
         </a:lnSpc>
         <a:spcBef>
-          <a:spcPts val="136"/>
+          <a:spcPts val="118"/>
         </a:spcBef>
         <a:buFont typeface="Arial" panose="020B0604020202020204" pitchFamily="34" charset="0"/>
         <a:buChar char="•"/>
-        <a:defRPr sz="491" kern="1200">
+        <a:defRPr sz="425" kern="1200">
           <a:solidFill>
             <a:schemeClr val="tx1"/>
           </a:solidFill>
@@ -2766,16 +2766,16 @@
           <a:cs typeface="+mn-cs"/>
         </a:defRPr>
       </a:lvl4pPr>
-      <a:lvl5pPr marL="561464" indent="-62385" algn="l" defTabSz="249540" rtl="0" eaLnBrk="1" latinLnBrk="0" hangingPunct="1">
+      <a:lvl5pPr marL="485752" indent="-53972" algn="l" defTabSz="215890" rtl="0" eaLnBrk="1" latinLnBrk="0" hangingPunct="1">
         <a:lnSpc>
           <a:spcPct val="90000"/>
         </a:lnSpc>
         <a:spcBef>
-          <a:spcPts val="136"/>
+          <a:spcPts val="118"/>
         </a:spcBef>
         <a:buFont typeface="Arial" panose="020B0604020202020204" pitchFamily="34" charset="0"/>
         <a:buChar char="•"/>
-        <a:defRPr sz="491" kern="1200">
+        <a:defRPr sz="425" kern="1200">
           <a:solidFill>
             <a:schemeClr val="tx1"/>
           </a:solidFill>
@@ -2784,16 +2784,16 @@
           <a:cs typeface="+mn-cs"/>
         </a:defRPr>
       </a:lvl5pPr>
-      <a:lvl6pPr marL="686234" indent="-62385" algn="l" defTabSz="249540" rtl="0" eaLnBrk="1" latinLnBrk="0" hangingPunct="1">
+      <a:lvl6pPr marL="593697" indent="-53972" algn="l" defTabSz="215890" rtl="0" eaLnBrk="1" latinLnBrk="0" hangingPunct="1">
         <a:lnSpc>
           <a:spcPct val="90000"/>
         </a:lnSpc>
         <a:spcBef>
-          <a:spcPts val="136"/>
+          <a:spcPts val="118"/>
         </a:spcBef>
         <a:buFont typeface="Arial" panose="020B0604020202020204" pitchFamily="34" charset="0"/>
         <a:buChar char="•"/>
-        <a:defRPr sz="491" kern="1200">
+        <a:defRPr sz="425" kern="1200">
           <a:solidFill>
             <a:schemeClr val="tx1"/>
           </a:solidFill>
@@ -2802,16 +2802,16 @@
           <a:cs typeface="+mn-cs"/>
         </a:defRPr>
       </a:lvl6pPr>
-      <a:lvl7pPr marL="811004" indent="-62385" algn="l" defTabSz="249540" rtl="0" eaLnBrk="1" latinLnBrk="0" hangingPunct="1">
+      <a:lvl7pPr marL="701642" indent="-53972" algn="l" defTabSz="215890" rtl="0" eaLnBrk="1" latinLnBrk="0" hangingPunct="1">
         <a:lnSpc>
           <a:spcPct val="90000"/>
         </a:lnSpc>
         <a:spcBef>
-          <a:spcPts val="136"/>
+          <a:spcPts val="118"/>
         </a:spcBef>
         <a:buFont typeface="Arial" panose="020B0604020202020204" pitchFamily="34" charset="0"/>
         <a:buChar char="•"/>
-        <a:defRPr sz="491" kern="1200">
+        <a:defRPr sz="425" kern="1200">
           <a:solidFill>
             <a:schemeClr val="tx1"/>
           </a:solidFill>
@@ -2820,16 +2820,16 @@
           <a:cs typeface="+mn-cs"/>
         </a:defRPr>
       </a:lvl7pPr>
-      <a:lvl8pPr marL="935774" indent="-62385" algn="l" defTabSz="249540" rtl="0" eaLnBrk="1" latinLnBrk="0" hangingPunct="1">
+      <a:lvl8pPr marL="809587" indent="-53972" algn="l" defTabSz="215890" rtl="0" eaLnBrk="1" latinLnBrk="0" hangingPunct="1">
         <a:lnSpc>
           <a:spcPct val="90000"/>
         </a:lnSpc>
         <a:spcBef>
-          <a:spcPts val="136"/>
+          <a:spcPts val="118"/>
         </a:spcBef>
         <a:buFont typeface="Arial" panose="020B0604020202020204" pitchFamily="34" charset="0"/>
         <a:buChar char="•"/>
-        <a:defRPr sz="491" kern="1200">
+        <a:defRPr sz="425" kern="1200">
           <a:solidFill>
             <a:schemeClr val="tx1"/>
           </a:solidFill>
@@ -2838,16 +2838,16 @@
           <a:cs typeface="+mn-cs"/>
         </a:defRPr>
       </a:lvl8pPr>
-      <a:lvl9pPr marL="1060544" indent="-62385" algn="l" defTabSz="249540" rtl="0" eaLnBrk="1" latinLnBrk="0" hangingPunct="1">
+      <a:lvl9pPr marL="917532" indent="-53972" algn="l" defTabSz="215890" rtl="0" eaLnBrk="1" latinLnBrk="0" hangingPunct="1">
         <a:lnSpc>
           <a:spcPct val="90000"/>
         </a:lnSpc>
         <a:spcBef>
-          <a:spcPts val="136"/>
+          <a:spcPts val="118"/>
         </a:spcBef>
         <a:buFont typeface="Arial" panose="020B0604020202020204" pitchFamily="34" charset="0"/>
         <a:buChar char="•"/>
-        <a:defRPr sz="491" kern="1200">
+        <a:defRPr sz="425" kern="1200">
           <a:solidFill>
             <a:schemeClr val="tx1"/>
           </a:solidFill>
@@ -2861,8 +2861,8 @@
       <a:defPPr>
         <a:defRPr lang="en-US"/>
       </a:defPPr>
-      <a:lvl1pPr marL="0" algn="l" defTabSz="249540" rtl="0" eaLnBrk="1" latinLnBrk="0" hangingPunct="1">
-        <a:defRPr sz="491" kern="1200">
+      <a:lvl1pPr marL="0" algn="l" defTabSz="215890" rtl="0" eaLnBrk="1" latinLnBrk="0" hangingPunct="1">
+        <a:defRPr sz="425" kern="1200">
           <a:solidFill>
             <a:schemeClr val="tx1"/>
           </a:solidFill>
@@ -2871,8 +2871,8 @@
           <a:cs typeface="+mn-cs"/>
         </a:defRPr>
       </a:lvl1pPr>
-      <a:lvl2pPr marL="124770" algn="l" defTabSz="249540" rtl="0" eaLnBrk="1" latinLnBrk="0" hangingPunct="1">
-        <a:defRPr sz="491" kern="1200">
+      <a:lvl2pPr marL="107945" algn="l" defTabSz="215890" rtl="0" eaLnBrk="1" latinLnBrk="0" hangingPunct="1">
+        <a:defRPr sz="425" kern="1200">
           <a:solidFill>
             <a:schemeClr val="tx1"/>
           </a:solidFill>
@@ -2881,8 +2881,8 @@
           <a:cs typeface="+mn-cs"/>
         </a:defRPr>
       </a:lvl2pPr>
-      <a:lvl3pPr marL="249540" algn="l" defTabSz="249540" rtl="0" eaLnBrk="1" latinLnBrk="0" hangingPunct="1">
-        <a:defRPr sz="491" kern="1200">
+      <a:lvl3pPr marL="215890" algn="l" defTabSz="215890" rtl="0" eaLnBrk="1" latinLnBrk="0" hangingPunct="1">
+        <a:defRPr sz="425" kern="1200">
           <a:solidFill>
             <a:schemeClr val="tx1"/>
           </a:solidFill>
@@ -2891,8 +2891,8 @@
           <a:cs typeface="+mn-cs"/>
         </a:defRPr>
       </a:lvl3pPr>
-      <a:lvl4pPr marL="374310" algn="l" defTabSz="249540" rtl="0" eaLnBrk="1" latinLnBrk="0" hangingPunct="1">
-        <a:defRPr sz="491" kern="1200">
+      <a:lvl4pPr marL="323835" algn="l" defTabSz="215890" rtl="0" eaLnBrk="1" latinLnBrk="0" hangingPunct="1">
+        <a:defRPr sz="425" kern="1200">
           <a:solidFill>
             <a:schemeClr val="tx1"/>
           </a:solidFill>
@@ -2901,8 +2901,8 @@
           <a:cs typeface="+mn-cs"/>
         </a:defRPr>
       </a:lvl4pPr>
-      <a:lvl5pPr marL="499080" algn="l" defTabSz="249540" rtl="0" eaLnBrk="1" latinLnBrk="0" hangingPunct="1">
-        <a:defRPr sz="491" kern="1200">
+      <a:lvl5pPr marL="431780" algn="l" defTabSz="215890" rtl="0" eaLnBrk="1" latinLnBrk="0" hangingPunct="1">
+        <a:defRPr sz="425" kern="1200">
           <a:solidFill>
             <a:schemeClr val="tx1"/>
           </a:solidFill>
@@ -2911,8 +2911,8 @@
           <a:cs typeface="+mn-cs"/>
         </a:defRPr>
       </a:lvl5pPr>
-      <a:lvl6pPr marL="623849" algn="l" defTabSz="249540" rtl="0" eaLnBrk="1" latinLnBrk="0" hangingPunct="1">
-        <a:defRPr sz="491" kern="1200">
+      <a:lvl6pPr marL="539725" algn="l" defTabSz="215890" rtl="0" eaLnBrk="1" latinLnBrk="0" hangingPunct="1">
+        <a:defRPr sz="425" kern="1200">
           <a:solidFill>
             <a:schemeClr val="tx1"/>
           </a:solidFill>
@@ -2921,8 +2921,8 @@
           <a:cs typeface="+mn-cs"/>
         </a:defRPr>
       </a:lvl6pPr>
-      <a:lvl7pPr marL="748619" algn="l" defTabSz="249540" rtl="0" eaLnBrk="1" latinLnBrk="0" hangingPunct="1">
-        <a:defRPr sz="491" kern="1200">
+      <a:lvl7pPr marL="647670" algn="l" defTabSz="215890" rtl="0" eaLnBrk="1" latinLnBrk="0" hangingPunct="1">
+        <a:defRPr sz="425" kern="1200">
           <a:solidFill>
             <a:schemeClr val="tx1"/>
           </a:solidFill>
@@ -2931,8 +2931,8 @@
           <a:cs typeface="+mn-cs"/>
         </a:defRPr>
       </a:lvl7pPr>
-      <a:lvl8pPr marL="873389" algn="l" defTabSz="249540" rtl="0" eaLnBrk="1" latinLnBrk="0" hangingPunct="1">
-        <a:defRPr sz="491" kern="1200">
+      <a:lvl8pPr marL="755614" algn="l" defTabSz="215890" rtl="0" eaLnBrk="1" latinLnBrk="0" hangingPunct="1">
+        <a:defRPr sz="425" kern="1200">
           <a:solidFill>
             <a:schemeClr val="tx1"/>
           </a:solidFill>
@@ -2941,8 +2941,8 @@
           <a:cs typeface="+mn-cs"/>
         </a:defRPr>
       </a:lvl8pPr>
-      <a:lvl9pPr marL="998159" algn="l" defTabSz="249540" rtl="0" eaLnBrk="1" latinLnBrk="0" hangingPunct="1">
-        <a:defRPr sz="491" kern="1200">
+      <a:lvl9pPr marL="863559" algn="l" defTabSz="215890" rtl="0" eaLnBrk="1" latinLnBrk="0" hangingPunct="1">
+        <a:defRPr sz="425" kern="1200">
           <a:solidFill>
             <a:schemeClr val="tx1"/>
           </a:solidFill>
@@ -2973,12 +2973,117 @@
           <a:chExt cx="0" cy="0"/>
         </a:xfrm>
       </p:grpSpPr>
+      <p:sp>
+        <p:nvSpPr>
+          <p:cNvPr id="20" name="ZoneTexte 19">
+            <a:extLst>
+              <a:ext uri="{FF2B5EF4-FFF2-40B4-BE49-F238E27FC236}">
+                <a16:creationId xmlns:a16="http://schemas.microsoft.com/office/drawing/2014/main" id="{72E01FBA-D518-D770-65C9-CA3D02D9B0E7}"/>
+              </a:ext>
+            </a:extLst>
+          </p:cNvPr>
+          <p:cNvSpPr txBox="1"/>
+          <p:nvPr/>
+        </p:nvSpPr>
+        <p:spPr>
+          <a:xfrm>
+            <a:off x="-77664" y="192"/>
+            <a:ext cx="290464" cy="200055"/>
+          </a:xfrm>
+          <a:prstGeom prst="rect">
+            <a:avLst/>
+          </a:prstGeom>
+          <a:noFill/>
+        </p:spPr>
+        <p:txBody>
+          <a:bodyPr wrap="none" rtlCol="0">
+            <a:spAutoFit/>
+          </a:bodyPr>
+          <a:lstStyle/>
+          <a:p>
+            <a:r>
+              <a:rPr lang="fr-FR" sz="700" dirty="0"/>
+              <a:t>(A)</a:t>
+            </a:r>
+          </a:p>
+        </p:txBody>
+      </p:sp>
+      <p:sp>
+        <p:nvSpPr>
+          <p:cNvPr id="21" name="ZoneTexte 20">
+            <a:extLst>
+              <a:ext uri="{FF2B5EF4-FFF2-40B4-BE49-F238E27FC236}">
+                <a16:creationId xmlns:a16="http://schemas.microsoft.com/office/drawing/2014/main" id="{E9497EF0-316A-9BAC-0EAA-1C79FD33B1B2}"/>
+              </a:ext>
+            </a:extLst>
+          </p:cNvPr>
+          <p:cNvSpPr txBox="1"/>
+          <p:nvPr/>
+        </p:nvSpPr>
+        <p:spPr>
+          <a:xfrm>
+            <a:off x="1036532" y="191"/>
+            <a:ext cx="287258" cy="200055"/>
+          </a:xfrm>
+          <a:prstGeom prst="rect">
+            <a:avLst/>
+          </a:prstGeom>
+          <a:noFill/>
+        </p:spPr>
+        <p:txBody>
+          <a:bodyPr wrap="none" rtlCol="0">
+            <a:spAutoFit/>
+          </a:bodyPr>
+          <a:lstStyle/>
+          <a:p>
+            <a:r>
+              <a:rPr lang="fr-FR" sz="700" dirty="0"/>
+              <a:t>(B)</a:t>
+            </a:r>
+          </a:p>
+        </p:txBody>
+      </p:sp>
+      <p:sp>
+        <p:nvSpPr>
+          <p:cNvPr id="24" name="ZoneTexte 23">
+            <a:extLst>
+              <a:ext uri="{FF2B5EF4-FFF2-40B4-BE49-F238E27FC236}">
+                <a16:creationId xmlns:a16="http://schemas.microsoft.com/office/drawing/2014/main" id="{F0556C2E-EB1B-9628-4126-6B04AB317219}"/>
+              </a:ext>
+            </a:extLst>
+          </p:cNvPr>
+          <p:cNvSpPr txBox="1"/>
+          <p:nvPr/>
+        </p:nvSpPr>
+        <p:spPr>
+          <a:xfrm>
+            <a:off x="1802125" y="190"/>
+            <a:ext cx="287258" cy="200055"/>
+          </a:xfrm>
+          <a:prstGeom prst="rect">
+            <a:avLst/>
+          </a:prstGeom>
+          <a:noFill/>
+        </p:spPr>
+        <p:txBody>
+          <a:bodyPr wrap="none" rtlCol="0">
+            <a:spAutoFit/>
+          </a:bodyPr>
+          <a:lstStyle/>
+          <a:p>
+            <a:r>
+              <a:rPr lang="fr-FR" sz="700" dirty="0"/>
+              <a:t>(C)</a:t>
+            </a:r>
+          </a:p>
+        </p:txBody>
+      </p:sp>
       <p:pic>
         <p:nvPicPr>
-          <p:cNvPr id="52" name="Image 51">
+          <p:cNvPr id="6" name="Image 5">
             <a:extLst>
               <a:ext uri="{FF2B5EF4-FFF2-40B4-BE49-F238E27FC236}">
-                <a16:creationId xmlns:a16="http://schemas.microsoft.com/office/drawing/2014/main" id="{918DB5F1-4972-25AA-132E-994564447D82}"/>
+                <a16:creationId xmlns:a16="http://schemas.microsoft.com/office/drawing/2014/main" id="{4EBABF41-E035-B9F6-3374-27374DEC57BD}"/>
               </a:ext>
             </a:extLst>
           </p:cNvPr>
@@ -2989,286 +3094,27 @@
         </p:nvPicPr>
         <p:blipFill>
           <a:blip r:embed="rId2"/>
-          <a:srcRect r="3054"/>
+          <a:srcRect l="21918" t="40190" r="19065" b="44541"/>
           <a:stretch>
             <a:fillRect/>
           </a:stretch>
         </p:blipFill>
         <p:spPr>
           <a:xfrm>
-            <a:off x="2327267" y="36546"/>
-            <a:ext cx="3711948" cy="1798573"/>
+            <a:off x="358048" y="1330874"/>
+            <a:ext cx="1460601" cy="200055"/>
           </a:xfrm>
           <a:prstGeom prst="rect">
             <a:avLst/>
           </a:prstGeom>
         </p:spPr>
       </p:pic>
-      <p:sp>
-        <p:nvSpPr>
-          <p:cNvPr id="20" name="ZoneTexte 19">
+      <p:pic>
+        <p:nvPicPr>
+          <p:cNvPr id="8" name="Image 7">
             <a:extLst>
               <a:ext uri="{FF2B5EF4-FFF2-40B4-BE49-F238E27FC236}">
-                <a16:creationId xmlns:a16="http://schemas.microsoft.com/office/drawing/2014/main" id="{72E01FBA-D518-D770-65C9-CA3D02D9B0E7}"/>
-              </a:ext>
-            </a:extLst>
-          </p:cNvPr>
-          <p:cNvSpPr txBox="1"/>
-          <p:nvPr/>
-        </p:nvSpPr>
-        <p:spPr>
-          <a:xfrm>
-            <a:off x="0" y="-24439"/>
-            <a:ext cx="335348" cy="246221"/>
-          </a:xfrm>
-          <a:prstGeom prst="rect">
-            <a:avLst/>
-          </a:prstGeom>
-          <a:noFill/>
-        </p:spPr>
-        <p:txBody>
-          <a:bodyPr wrap="none" rtlCol="0">
-            <a:spAutoFit/>
-          </a:bodyPr>
-          <a:lstStyle/>
-          <a:p>
-            <a:r>
-              <a:rPr lang="fr-FR" sz="1000" dirty="0"/>
-              <a:t>(A)</a:t>
-            </a:r>
-          </a:p>
-        </p:txBody>
-      </p:sp>
-      <p:sp>
-        <p:nvSpPr>
-          <p:cNvPr id="21" name="ZoneTexte 20">
-            <a:extLst>
-              <a:ext uri="{FF2B5EF4-FFF2-40B4-BE49-F238E27FC236}">
-                <a16:creationId xmlns:a16="http://schemas.microsoft.com/office/drawing/2014/main" id="{E9497EF0-316A-9BAC-0EAA-1C79FD33B1B2}"/>
-              </a:ext>
-            </a:extLst>
-          </p:cNvPr>
-          <p:cNvSpPr txBox="1"/>
-          <p:nvPr/>
-        </p:nvSpPr>
-        <p:spPr>
-          <a:xfrm>
-            <a:off x="2279029" y="-23320"/>
-            <a:ext cx="332142" cy="246221"/>
-          </a:xfrm>
-          <a:prstGeom prst="rect">
-            <a:avLst/>
-          </a:prstGeom>
-          <a:noFill/>
-        </p:spPr>
-        <p:txBody>
-          <a:bodyPr wrap="none" rtlCol="0">
-            <a:spAutoFit/>
-          </a:bodyPr>
-          <a:lstStyle/>
-          <a:p>
-            <a:r>
-              <a:rPr lang="fr-FR" sz="1000" dirty="0"/>
-              <a:t>(B)</a:t>
-            </a:r>
-          </a:p>
-        </p:txBody>
-      </p:sp>
-      <p:sp>
-        <p:nvSpPr>
-          <p:cNvPr id="24" name="ZoneTexte 23">
-            <a:extLst>
-              <a:ext uri="{FF2B5EF4-FFF2-40B4-BE49-F238E27FC236}">
-                <a16:creationId xmlns:a16="http://schemas.microsoft.com/office/drawing/2014/main" id="{F0556C2E-EB1B-9628-4126-6B04AB317219}"/>
-              </a:ext>
-            </a:extLst>
-          </p:cNvPr>
-          <p:cNvSpPr txBox="1"/>
-          <p:nvPr/>
-        </p:nvSpPr>
-        <p:spPr>
-          <a:xfrm>
-            <a:off x="4097348" y="-23320"/>
-            <a:ext cx="330540" cy="246221"/>
-          </a:xfrm>
-          <a:prstGeom prst="rect">
-            <a:avLst/>
-          </a:prstGeom>
-          <a:noFill/>
-        </p:spPr>
-        <p:txBody>
-          <a:bodyPr wrap="none" rtlCol="0">
-            <a:spAutoFit/>
-          </a:bodyPr>
-          <a:lstStyle/>
-          <a:p>
-            <a:r>
-              <a:rPr lang="fr-FR" sz="1000" dirty="0"/>
-              <a:t>(C)</a:t>
-            </a:r>
-          </a:p>
-        </p:txBody>
-      </p:sp>
-      <p:sp>
-        <p:nvSpPr>
-          <p:cNvPr id="146" name="Rectangle : coins arrondis 145">
-            <a:extLst>
-              <a:ext uri="{FF2B5EF4-FFF2-40B4-BE49-F238E27FC236}">
-                <a16:creationId xmlns:a16="http://schemas.microsoft.com/office/drawing/2014/main" id="{D76107C6-330F-ABD7-98BD-895DF2544441}"/>
-              </a:ext>
-            </a:extLst>
-          </p:cNvPr>
-          <p:cNvSpPr/>
-          <p:nvPr/>
-        </p:nvSpPr>
-        <p:spPr>
-          <a:xfrm>
-            <a:off x="49520" y="752273"/>
-            <a:ext cx="902811" cy="400543"/>
-          </a:xfrm>
-          <a:prstGeom prst="roundRect">
-            <a:avLst/>
-          </a:prstGeom>
-          <a:noFill/>
-        </p:spPr>
-        <p:style>
-          <a:lnRef idx="2">
-            <a:schemeClr val="accent1">
-              <a:shade val="15000"/>
-            </a:schemeClr>
-          </a:lnRef>
-          <a:fillRef idx="1">
-            <a:schemeClr val="accent1"/>
-          </a:fillRef>
-          <a:effectRef idx="0">
-            <a:schemeClr val="accent1"/>
-          </a:effectRef>
-          <a:fontRef idx="minor">
-            <a:schemeClr val="lt1"/>
-          </a:fontRef>
-        </p:style>
-        <p:txBody>
-          <a:bodyPr rtlCol="0" anchor="ctr"/>
-          <a:lstStyle/>
-          <a:p>
-            <a:pPr algn="ctr"/>
-            <a:endParaRPr lang="en-GB" dirty="0"/>
-          </a:p>
-        </p:txBody>
-      </p:sp>
-      <p:sp>
-        <p:nvSpPr>
-          <p:cNvPr id="151" name="ZoneTexte 150">
-            <a:extLst>
-              <a:ext uri="{FF2B5EF4-FFF2-40B4-BE49-F238E27FC236}">
-                <a16:creationId xmlns:a16="http://schemas.microsoft.com/office/drawing/2014/main" id="{D4853588-D01B-5F8F-E5C1-4752BBAA41A1}"/>
-              </a:ext>
-            </a:extLst>
-          </p:cNvPr>
-          <p:cNvSpPr txBox="1"/>
-          <p:nvPr/>
-        </p:nvSpPr>
-        <p:spPr>
-          <a:xfrm>
-            <a:off x="275212" y="760355"/>
-            <a:ext cx="607740" cy="153888"/>
-          </a:xfrm>
-          <a:prstGeom prst="rect">
-            <a:avLst/>
-          </a:prstGeom>
-          <a:noFill/>
-        </p:spPr>
-        <p:txBody>
-          <a:bodyPr wrap="square" rtlCol="0">
-            <a:spAutoFit/>
-          </a:bodyPr>
-          <a:lstStyle/>
-          <a:p>
-            <a:r>
-              <a:rPr lang="en-GB" sz="400" dirty="0"/>
-              <a:t>Blood markers </a:t>
-            </a:r>
-          </a:p>
-        </p:txBody>
-      </p:sp>
-      <p:sp>
-        <p:nvSpPr>
-          <p:cNvPr id="152" name="ZoneTexte 151">
-            <a:extLst>
-              <a:ext uri="{FF2B5EF4-FFF2-40B4-BE49-F238E27FC236}">
-                <a16:creationId xmlns:a16="http://schemas.microsoft.com/office/drawing/2014/main" id="{A34E271F-EFF1-2090-CA53-6E6E186D899C}"/>
-              </a:ext>
-            </a:extLst>
-          </p:cNvPr>
-          <p:cNvSpPr txBox="1"/>
-          <p:nvPr/>
-        </p:nvSpPr>
-        <p:spPr>
-          <a:xfrm>
-            <a:off x="275212" y="837276"/>
-            <a:ext cx="607740" cy="215444"/>
-          </a:xfrm>
-          <a:prstGeom prst="rect">
-            <a:avLst/>
-          </a:prstGeom>
-          <a:noFill/>
-        </p:spPr>
-        <p:txBody>
-          <a:bodyPr wrap="square" rtlCol="0">
-            <a:spAutoFit/>
-          </a:bodyPr>
-          <a:lstStyle/>
-          <a:p>
-            <a:pPr algn="just"/>
-            <a:r>
-              <a:rPr lang="en-GB" sz="400" dirty="0"/>
-              <a:t>Serum Mid-infrared spectroscopy</a:t>
-            </a:r>
-          </a:p>
-        </p:txBody>
-      </p:sp>
-      <p:sp>
-        <p:nvSpPr>
-          <p:cNvPr id="153" name="ZoneTexte 152">
-            <a:extLst>
-              <a:ext uri="{FF2B5EF4-FFF2-40B4-BE49-F238E27FC236}">
-                <a16:creationId xmlns:a16="http://schemas.microsoft.com/office/drawing/2014/main" id="{6A694BEC-7636-6B36-C36B-2D3AEBCE77D5}"/>
-              </a:ext>
-            </a:extLst>
-          </p:cNvPr>
-          <p:cNvSpPr txBox="1"/>
-          <p:nvPr/>
-        </p:nvSpPr>
-        <p:spPr>
-          <a:xfrm>
-            <a:off x="275212" y="985843"/>
-            <a:ext cx="607740" cy="153888"/>
-          </a:xfrm>
-          <a:prstGeom prst="rect">
-            <a:avLst/>
-          </a:prstGeom>
-          <a:noFill/>
-        </p:spPr>
-        <p:txBody>
-          <a:bodyPr wrap="square" rtlCol="0">
-            <a:spAutoFit/>
-          </a:bodyPr>
-          <a:lstStyle/>
-          <a:p>
-            <a:pPr algn="just"/>
-            <a:r>
-              <a:rPr lang="en-GB" sz="400" dirty="0"/>
-              <a:t>Serum metallome</a:t>
-            </a:r>
-          </a:p>
-        </p:txBody>
-      </p:sp>
-      <p:pic>
-        <p:nvPicPr>
-          <p:cNvPr id="155" name="Image 154">
-            <a:extLst>
-              <a:ext uri="{FF2B5EF4-FFF2-40B4-BE49-F238E27FC236}">
-                <a16:creationId xmlns:a16="http://schemas.microsoft.com/office/drawing/2014/main" id="{A1115FA2-4F4C-2BBE-1D42-7B3CABC5BF07}"/>
+                <a16:creationId xmlns:a16="http://schemas.microsoft.com/office/drawing/2014/main" id="{704B9E24-195F-0E29-597B-3FE6E1E1BEEF}"/>
               </a:ext>
             </a:extLst>
           </p:cNvPr>
@@ -3285,530 +3131,8 @@
         </p:blipFill>
         <p:spPr>
           <a:xfrm>
-            <a:off x="90500" y="822156"/>
-            <a:ext cx="239348" cy="239348"/>
-          </a:xfrm>
-          <a:prstGeom prst="rect">
-            <a:avLst/>
-          </a:prstGeom>
-        </p:spPr>
-      </p:pic>
-      <p:cxnSp>
-        <p:nvCxnSpPr>
-          <p:cNvPr id="22" name="Connecteur en angle 21">
-            <a:extLst>
-              <a:ext uri="{FF2B5EF4-FFF2-40B4-BE49-F238E27FC236}">
-                <a16:creationId xmlns:a16="http://schemas.microsoft.com/office/drawing/2014/main" id="{18460DF0-0E59-E6F7-1BDB-4A28E0113D40}"/>
-              </a:ext>
-            </a:extLst>
-          </p:cNvPr>
-          <p:cNvCxnSpPr>
-            <a:cxnSpLocks/>
-            <a:stCxn id="146" idx="3"/>
-            <a:endCxn id="25" idx="1"/>
-          </p:cNvCxnSpPr>
-          <p:nvPr/>
-        </p:nvCxnSpPr>
-        <p:spPr>
-          <a:xfrm flipV="1">
-            <a:off x="952331" y="461066"/>
-            <a:ext cx="376247" cy="491479"/>
-          </a:xfrm>
-          <a:prstGeom prst="bentConnector3">
-            <a:avLst/>
-          </a:prstGeom>
-          <a:ln>
-            <a:tailEnd type="triangle"/>
-          </a:ln>
-        </p:spPr>
-        <p:style>
-          <a:lnRef idx="1">
-            <a:schemeClr val="dk1"/>
-          </a:lnRef>
-          <a:fillRef idx="0">
-            <a:schemeClr val="dk1"/>
-          </a:fillRef>
-          <a:effectRef idx="0">
-            <a:schemeClr val="dk1"/>
-          </a:effectRef>
-          <a:fontRef idx="minor">
-            <a:schemeClr val="tx1"/>
-          </a:fontRef>
-        </p:style>
-      </p:cxnSp>
-      <p:sp>
-        <p:nvSpPr>
-          <p:cNvPr id="25" name="Rectangle : coins arrondis 24">
-            <a:extLst>
-              <a:ext uri="{FF2B5EF4-FFF2-40B4-BE49-F238E27FC236}">
-                <a16:creationId xmlns:a16="http://schemas.microsoft.com/office/drawing/2014/main" id="{E699E279-5D85-32AB-9970-74F7644A1A69}"/>
-              </a:ext>
-            </a:extLst>
-          </p:cNvPr>
-          <p:cNvSpPr/>
-          <p:nvPr/>
-        </p:nvSpPr>
-        <p:spPr>
-          <a:xfrm>
-            <a:off x="1328578" y="260794"/>
-            <a:ext cx="902811" cy="400543"/>
-          </a:xfrm>
-          <a:prstGeom prst="roundRect">
-            <a:avLst/>
-          </a:prstGeom>
-          <a:solidFill>
-            <a:srgbClr val="B32221">
-              <a:alpha val="20000"/>
-            </a:srgbClr>
-          </a:solidFill>
-        </p:spPr>
-        <p:style>
-          <a:lnRef idx="2">
-            <a:schemeClr val="accent1">
-              <a:shade val="15000"/>
-            </a:schemeClr>
-          </a:lnRef>
-          <a:fillRef idx="1">
-            <a:schemeClr val="accent1"/>
-          </a:fillRef>
-          <a:effectRef idx="0">
-            <a:schemeClr val="accent1"/>
-          </a:effectRef>
-          <a:fontRef idx="minor">
-            <a:schemeClr val="lt1"/>
-          </a:fontRef>
-        </p:style>
-        <p:txBody>
-          <a:bodyPr rtlCol="0" anchor="ctr"/>
-          <a:lstStyle/>
-          <a:p>
-            <a:pPr algn="ctr"/>
-            <a:endParaRPr lang="en-GB" dirty="0"/>
-          </a:p>
-        </p:txBody>
-      </p:sp>
-      <p:sp>
-        <p:nvSpPr>
-          <p:cNvPr id="26" name="Rectangle : coins arrondis 25">
-            <a:extLst>
-              <a:ext uri="{FF2B5EF4-FFF2-40B4-BE49-F238E27FC236}">
-                <a16:creationId xmlns:a16="http://schemas.microsoft.com/office/drawing/2014/main" id="{64C367CC-F1AA-EC19-0CAF-73BC6E15E37C}"/>
-              </a:ext>
-            </a:extLst>
-          </p:cNvPr>
-          <p:cNvSpPr/>
-          <p:nvPr/>
-        </p:nvSpPr>
-        <p:spPr>
-          <a:xfrm>
-            <a:off x="1328578" y="752273"/>
-            <a:ext cx="902811" cy="400543"/>
-          </a:xfrm>
-          <a:prstGeom prst="roundRect">
-            <a:avLst/>
-          </a:prstGeom>
-          <a:solidFill>
-            <a:srgbClr val="6495ED">
-              <a:alpha val="20000"/>
-            </a:srgbClr>
-          </a:solidFill>
-        </p:spPr>
-        <p:style>
-          <a:lnRef idx="2">
-            <a:schemeClr val="accent1">
-              <a:shade val="15000"/>
-            </a:schemeClr>
-          </a:lnRef>
-          <a:fillRef idx="1">
-            <a:schemeClr val="accent1"/>
-          </a:fillRef>
-          <a:effectRef idx="0">
-            <a:schemeClr val="accent1"/>
-          </a:effectRef>
-          <a:fontRef idx="minor">
-            <a:schemeClr val="lt1"/>
-          </a:fontRef>
-        </p:style>
-        <p:txBody>
-          <a:bodyPr rtlCol="0" anchor="ctr"/>
-          <a:lstStyle/>
-          <a:p>
-            <a:pPr algn="ctr"/>
-            <a:endParaRPr lang="en-GB" dirty="0"/>
-          </a:p>
-        </p:txBody>
-      </p:sp>
-      <p:sp>
-        <p:nvSpPr>
-          <p:cNvPr id="27" name="Rectangle : coins arrondis 26">
-            <a:extLst>
-              <a:ext uri="{FF2B5EF4-FFF2-40B4-BE49-F238E27FC236}">
-                <a16:creationId xmlns:a16="http://schemas.microsoft.com/office/drawing/2014/main" id="{FFD30FCE-87A0-2954-B9BD-DD45AB106570}"/>
-              </a:ext>
-            </a:extLst>
-          </p:cNvPr>
-          <p:cNvSpPr/>
-          <p:nvPr/>
-        </p:nvSpPr>
-        <p:spPr>
-          <a:xfrm>
-            <a:off x="1328578" y="1250501"/>
-            <a:ext cx="902811" cy="400543"/>
-          </a:xfrm>
-          <a:prstGeom prst="roundRect">
-            <a:avLst/>
-          </a:prstGeom>
-          <a:noFill/>
-        </p:spPr>
-        <p:style>
-          <a:lnRef idx="2">
-            <a:schemeClr val="accent1">
-              <a:shade val="15000"/>
-            </a:schemeClr>
-          </a:lnRef>
-          <a:fillRef idx="1">
-            <a:schemeClr val="accent1"/>
-          </a:fillRef>
-          <a:effectRef idx="0">
-            <a:schemeClr val="accent1"/>
-          </a:effectRef>
-          <a:fontRef idx="minor">
-            <a:schemeClr val="lt1"/>
-          </a:fontRef>
-        </p:style>
-        <p:txBody>
-          <a:bodyPr rtlCol="0" anchor="ctr"/>
-          <a:lstStyle/>
-          <a:p>
-            <a:pPr algn="ctr"/>
-            <a:endParaRPr lang="en-GB" dirty="0"/>
-          </a:p>
-        </p:txBody>
-      </p:sp>
-      <p:cxnSp>
-        <p:nvCxnSpPr>
-          <p:cNvPr id="32" name="Connecteur en angle 31">
-            <a:extLst>
-              <a:ext uri="{FF2B5EF4-FFF2-40B4-BE49-F238E27FC236}">
-                <a16:creationId xmlns:a16="http://schemas.microsoft.com/office/drawing/2014/main" id="{05B73793-D8EF-32E3-50EB-A299083273A1}"/>
-              </a:ext>
-            </a:extLst>
-          </p:cNvPr>
-          <p:cNvCxnSpPr>
-            <a:cxnSpLocks/>
-            <a:stCxn id="146" idx="3"/>
-            <a:endCxn id="27" idx="1"/>
-          </p:cNvCxnSpPr>
-          <p:nvPr/>
-        </p:nvCxnSpPr>
-        <p:spPr>
-          <a:xfrm>
-            <a:off x="952331" y="952541"/>
-            <a:ext cx="376247" cy="498228"/>
-          </a:xfrm>
-          <a:prstGeom prst="bentConnector3">
-            <a:avLst/>
-          </a:prstGeom>
-          <a:ln>
-            <a:tailEnd type="triangle"/>
-          </a:ln>
-        </p:spPr>
-        <p:style>
-          <a:lnRef idx="1">
-            <a:schemeClr val="dk1"/>
-          </a:lnRef>
-          <a:fillRef idx="0">
-            <a:schemeClr val="dk1"/>
-          </a:fillRef>
-          <a:effectRef idx="0">
-            <a:schemeClr val="dk1"/>
-          </a:effectRef>
-          <a:fontRef idx="minor">
-            <a:schemeClr val="tx1"/>
-          </a:fontRef>
-        </p:style>
-      </p:cxnSp>
-      <p:cxnSp>
-        <p:nvCxnSpPr>
-          <p:cNvPr id="42" name="Connecteur droit avec flèche 41">
-            <a:extLst>
-              <a:ext uri="{FF2B5EF4-FFF2-40B4-BE49-F238E27FC236}">
-                <a16:creationId xmlns:a16="http://schemas.microsoft.com/office/drawing/2014/main" id="{77B7BCF8-8A62-6C83-BDB4-0BF71A41A9AF}"/>
-              </a:ext>
-            </a:extLst>
-          </p:cNvPr>
-          <p:cNvCxnSpPr>
-            <a:cxnSpLocks/>
-            <a:stCxn id="146" idx="3"/>
-            <a:endCxn id="26" idx="1"/>
-          </p:cNvCxnSpPr>
-          <p:nvPr/>
-        </p:nvCxnSpPr>
-        <p:spPr>
-          <a:xfrm>
-            <a:off x="952331" y="952541"/>
-            <a:ext cx="376247" cy="0"/>
-          </a:xfrm>
-          <a:prstGeom prst="straightConnector1">
-            <a:avLst/>
-          </a:prstGeom>
-          <a:ln>
-            <a:tailEnd type="triangle"/>
-          </a:ln>
-        </p:spPr>
-        <p:style>
-          <a:lnRef idx="1">
-            <a:schemeClr val="dk1"/>
-          </a:lnRef>
-          <a:fillRef idx="0">
-            <a:schemeClr val="dk1"/>
-          </a:fillRef>
-          <a:effectRef idx="0">
-            <a:schemeClr val="dk1"/>
-          </a:effectRef>
-          <a:fontRef idx="minor">
-            <a:schemeClr val="tx1"/>
-          </a:fontRef>
-        </p:style>
-      </p:cxnSp>
-      <p:sp>
-        <p:nvSpPr>
-          <p:cNvPr id="47" name="ZoneTexte 46">
-            <a:extLst>
-              <a:ext uri="{FF2B5EF4-FFF2-40B4-BE49-F238E27FC236}">
-                <a16:creationId xmlns:a16="http://schemas.microsoft.com/office/drawing/2014/main" id="{32871EE6-C766-62DF-12E8-E0BCCA1E1B7B}"/>
-              </a:ext>
-            </a:extLst>
-          </p:cNvPr>
-          <p:cNvSpPr txBox="1"/>
-          <p:nvPr/>
-        </p:nvSpPr>
-        <p:spPr>
-          <a:xfrm>
-            <a:off x="1340234" y="395324"/>
-            <a:ext cx="838750" cy="215444"/>
-          </a:xfrm>
-          <a:prstGeom prst="rect">
-            <a:avLst/>
-          </a:prstGeom>
-          <a:noFill/>
-        </p:spPr>
-        <p:txBody>
-          <a:bodyPr wrap="square" rtlCol="0">
-            <a:spAutoFit/>
-          </a:bodyPr>
-          <a:lstStyle/>
-          <a:p>
-            <a:pPr algn="just"/>
-            <a:r>
-              <a:rPr lang="en-GB" sz="400" dirty="0"/>
-              <a:t>Random Forest on each type of data, as illustrated in (B).</a:t>
-            </a:r>
-          </a:p>
-        </p:txBody>
-      </p:sp>
-      <p:sp>
-        <p:nvSpPr>
-          <p:cNvPr id="48" name="ZoneTexte 47">
-            <a:extLst>
-              <a:ext uri="{FF2B5EF4-FFF2-40B4-BE49-F238E27FC236}">
-                <a16:creationId xmlns:a16="http://schemas.microsoft.com/office/drawing/2014/main" id="{5A9B58E1-09B1-B065-37DB-FFEF5DEDDFC2}"/>
-              </a:ext>
-            </a:extLst>
-          </p:cNvPr>
-          <p:cNvSpPr txBox="1"/>
-          <p:nvPr/>
-        </p:nvSpPr>
-        <p:spPr>
-          <a:xfrm>
-            <a:off x="1340238" y="289141"/>
-            <a:ext cx="840641" cy="153888"/>
-          </a:xfrm>
-          <a:prstGeom prst="rect">
-            <a:avLst/>
-          </a:prstGeom>
-          <a:noFill/>
-        </p:spPr>
-        <p:txBody>
-          <a:bodyPr wrap="square" rtlCol="0">
-            <a:spAutoFit/>
-          </a:bodyPr>
-          <a:lstStyle/>
-          <a:p>
-            <a:r>
-              <a:rPr lang="en-GB" sz="400" b="1" dirty="0"/>
-              <a:t>STRATEGY n°1: Single model</a:t>
-            </a:r>
-          </a:p>
-        </p:txBody>
-      </p:sp>
-      <p:sp>
-        <p:nvSpPr>
-          <p:cNvPr id="49" name="ZoneTexte 48">
-            <a:extLst>
-              <a:ext uri="{FF2B5EF4-FFF2-40B4-BE49-F238E27FC236}">
-                <a16:creationId xmlns:a16="http://schemas.microsoft.com/office/drawing/2014/main" id="{DF712C36-D164-52D9-39D9-73545F366178}"/>
-              </a:ext>
-            </a:extLst>
-          </p:cNvPr>
-          <p:cNvSpPr txBox="1"/>
-          <p:nvPr/>
-        </p:nvSpPr>
-        <p:spPr>
-          <a:xfrm>
-            <a:off x="1340238" y="760355"/>
-            <a:ext cx="975373" cy="153888"/>
-          </a:xfrm>
-          <a:prstGeom prst="rect">
-            <a:avLst/>
-          </a:prstGeom>
-          <a:noFill/>
-        </p:spPr>
-        <p:txBody>
-          <a:bodyPr wrap="square" rtlCol="0">
-            <a:spAutoFit/>
-          </a:bodyPr>
-          <a:lstStyle/>
-          <a:p>
-            <a:r>
-              <a:rPr lang="en-GB" sz="400" b="1" dirty="0"/>
-              <a:t>STRATEGY n°2: Aggregated models</a:t>
-            </a:r>
-          </a:p>
-        </p:txBody>
-      </p:sp>
-      <p:sp>
-        <p:nvSpPr>
-          <p:cNvPr id="50" name="ZoneTexte 49">
-            <a:extLst>
-              <a:ext uri="{FF2B5EF4-FFF2-40B4-BE49-F238E27FC236}">
-                <a16:creationId xmlns:a16="http://schemas.microsoft.com/office/drawing/2014/main" id="{A472FDBF-54E8-F124-58EF-A1C547E2921F}"/>
-              </a:ext>
-            </a:extLst>
-          </p:cNvPr>
-          <p:cNvSpPr txBox="1"/>
-          <p:nvPr/>
-        </p:nvSpPr>
-        <p:spPr>
-          <a:xfrm>
-            <a:off x="1340238" y="856602"/>
-            <a:ext cx="891151" cy="276999"/>
-          </a:xfrm>
-          <a:prstGeom prst="rect">
-            <a:avLst/>
-          </a:prstGeom>
-          <a:noFill/>
-        </p:spPr>
-        <p:txBody>
-          <a:bodyPr wrap="square" rtlCol="0">
-            <a:spAutoFit/>
-          </a:bodyPr>
-          <a:lstStyle/>
-          <a:p>
-            <a:pPr algn="just"/>
-            <a:r>
-              <a:rPr lang="en-GB" sz="400" dirty="0"/>
-              <a:t>Random Forest is first applied on blood makers, then on the residuals of the model, etc.</a:t>
-            </a:r>
-          </a:p>
-        </p:txBody>
-      </p:sp>
-      <p:sp>
-        <p:nvSpPr>
-          <p:cNvPr id="53" name="ZoneTexte 52">
-            <a:extLst>
-              <a:ext uri="{FF2B5EF4-FFF2-40B4-BE49-F238E27FC236}">
-                <a16:creationId xmlns:a16="http://schemas.microsoft.com/office/drawing/2014/main" id="{93458BBC-B9F0-115F-2E2E-BACD83D8E73C}"/>
-              </a:ext>
-            </a:extLst>
-          </p:cNvPr>
-          <p:cNvSpPr txBox="1"/>
-          <p:nvPr/>
-        </p:nvSpPr>
-        <p:spPr>
-          <a:xfrm>
-            <a:off x="1340237" y="1259696"/>
-            <a:ext cx="975373" cy="153888"/>
-          </a:xfrm>
-          <a:prstGeom prst="rect">
-            <a:avLst/>
-          </a:prstGeom>
-          <a:noFill/>
-        </p:spPr>
-        <p:txBody>
-          <a:bodyPr wrap="square" rtlCol="0">
-            <a:spAutoFit/>
-          </a:bodyPr>
-          <a:lstStyle/>
-          <a:p>
-            <a:r>
-              <a:rPr lang="en-GB" sz="400" b="1" dirty="0"/>
-              <a:t>STRATEGY n°3: Pooled data</a:t>
-            </a:r>
-          </a:p>
-        </p:txBody>
-      </p:sp>
-      <p:sp>
-        <p:nvSpPr>
-          <p:cNvPr id="54" name="ZoneTexte 53">
-            <a:extLst>
-              <a:ext uri="{FF2B5EF4-FFF2-40B4-BE49-F238E27FC236}">
-                <a16:creationId xmlns:a16="http://schemas.microsoft.com/office/drawing/2014/main" id="{2B9F0A95-8047-88B4-22F9-5E98A44E9724}"/>
-              </a:ext>
-            </a:extLst>
-          </p:cNvPr>
-          <p:cNvSpPr txBox="1"/>
-          <p:nvPr/>
-        </p:nvSpPr>
-        <p:spPr>
-          <a:xfrm>
-            <a:off x="1334407" y="1371328"/>
-            <a:ext cx="891151" cy="215444"/>
-          </a:xfrm>
-          <a:prstGeom prst="rect">
-            <a:avLst/>
-          </a:prstGeom>
-          <a:noFill/>
-        </p:spPr>
-        <p:txBody>
-          <a:bodyPr wrap="square" rtlCol="0">
-            <a:spAutoFit/>
-          </a:bodyPr>
-          <a:lstStyle/>
-          <a:p>
-            <a:pPr algn="just"/>
-            <a:r>
-              <a:rPr lang="en-GB" sz="400" dirty="0"/>
-              <a:t>Extreme Gradient Boosting model applied to pooled data.</a:t>
-            </a:r>
-          </a:p>
-        </p:txBody>
-      </p:sp>
-      <p:pic>
-        <p:nvPicPr>
-          <p:cNvPr id="3" name="Image 2">
-            <a:extLst>
-              <a:ext uri="{FF2B5EF4-FFF2-40B4-BE49-F238E27FC236}">
-                <a16:creationId xmlns:a16="http://schemas.microsoft.com/office/drawing/2014/main" id="{797C6186-DC3B-618F-FF67-271FAF29A640}"/>
-              </a:ext>
-            </a:extLst>
-          </p:cNvPr>
-          <p:cNvPicPr>
-            <a:picLocks noChangeAspect="1"/>
-          </p:cNvPicPr>
-          <p:nvPr/>
-        </p:nvPicPr>
-        <p:blipFill>
-          <a:blip r:embed="rId4"/>
-          <a:srcRect l="18270" t="42332" r="10547" b="45875"/>
-          <a:stretch>
-            <a:fillRect/>
-          </a:stretch>
-        </p:blipFill>
-        <p:spPr>
-          <a:xfrm>
-            <a:off x="2411787" y="1626447"/>
-            <a:ext cx="1751661" cy="206546"/>
+            <a:off x="0" y="43654"/>
+            <a:ext cx="3114924" cy="1465846"/>
           </a:xfrm>
           <a:prstGeom prst="rect">
             <a:avLst/>

--- a/figures/Figure_4.pptx
+++ b/figures/Figure_4.pptx
@@ -2,12 +2,15 @@
 <file path=ppt/presentation.xml><?xml version="1.0" encoding="utf-8"?>
 <p:presentation xmlns:a="http://schemas.openxmlformats.org/drawingml/2006/main" xmlns:r="http://schemas.openxmlformats.org/officeDocument/2006/relationships" xmlns:p="http://schemas.openxmlformats.org/presentationml/2006/main" saveSubsetFonts="1" autoCompressPictures="0">
   <p:sldMasterIdLst>
-    <p:sldMasterId id="2147483744" r:id="rId1"/>
+    <p:sldMasterId id="2147483756" r:id="rId1"/>
   </p:sldMasterIdLst>
+  <p:notesMasterIdLst>
+    <p:notesMasterId r:id="rId3"/>
+  </p:notesMasterIdLst>
   <p:sldIdLst>
     <p:sldId id="256" r:id="rId2"/>
   </p:sldIdLst>
-  <p:sldSz cx="3060700" cy="1619250"/>
+  <p:sldSz cx="3060700" cy="1439863"/>
   <p:notesSz cx="6858000" cy="9144000"/>
   <p:defaultTextStyle>
     <a:defPPr>
@@ -112,6 +115,439 @@
 </p:presentation>
 </file>
 
+<file path=ppt/notesMasters/notesMaster1.xml><?xml version="1.0" encoding="utf-8"?>
+<p:notesMaster xmlns:a="http://schemas.openxmlformats.org/drawingml/2006/main" xmlns:r="http://schemas.openxmlformats.org/officeDocument/2006/relationships" xmlns:p="http://schemas.openxmlformats.org/presentationml/2006/main">
+  <p:cSld>
+    <p:bg>
+      <p:bgRef idx="1001">
+        <a:schemeClr val="bg1"/>
+      </p:bgRef>
+    </p:bg>
+    <p:spTree>
+      <p:nvGrpSpPr>
+        <p:cNvPr id="1" name=""/>
+        <p:cNvGrpSpPr/>
+        <p:nvPr/>
+      </p:nvGrpSpPr>
+      <p:grpSpPr>
+        <a:xfrm>
+          <a:off x="0" y="0"/>
+          <a:ext cx="0" cy="0"/>
+          <a:chOff x="0" y="0"/>
+          <a:chExt cx="0" cy="0"/>
+        </a:xfrm>
+      </p:grpSpPr>
+      <p:sp>
+        <p:nvSpPr>
+          <p:cNvPr id="2" name="Espace réservé de l'en-tête 1"/>
+          <p:cNvSpPr>
+            <a:spLocks noGrp="1"/>
+          </p:cNvSpPr>
+          <p:nvPr>
+            <p:ph type="hdr" sz="quarter"/>
+          </p:nvPr>
+        </p:nvSpPr>
+        <p:spPr>
+          <a:xfrm>
+            <a:off x="0" y="0"/>
+            <a:ext cx="2971800" cy="458788"/>
+          </a:xfrm>
+          <a:prstGeom prst="rect">
+            <a:avLst/>
+          </a:prstGeom>
+        </p:spPr>
+        <p:txBody>
+          <a:bodyPr vert="horz" lIns="91440" tIns="45720" rIns="91440" bIns="45720" rtlCol="0"/>
+          <a:lstStyle>
+            <a:lvl1pPr algn="l">
+              <a:defRPr sz="1200"/>
+            </a:lvl1pPr>
+          </a:lstStyle>
+          <a:p>
+            <a:endParaRPr lang="fr-FR"/>
+          </a:p>
+        </p:txBody>
+      </p:sp>
+      <p:sp>
+        <p:nvSpPr>
+          <p:cNvPr id="3" name="Espace réservé de la date 2"/>
+          <p:cNvSpPr>
+            <a:spLocks noGrp="1"/>
+          </p:cNvSpPr>
+          <p:nvPr>
+            <p:ph type="dt" idx="1"/>
+          </p:nvPr>
+        </p:nvSpPr>
+        <p:spPr>
+          <a:xfrm>
+            <a:off x="3884613" y="0"/>
+            <a:ext cx="2971800" cy="458788"/>
+          </a:xfrm>
+          <a:prstGeom prst="rect">
+            <a:avLst/>
+          </a:prstGeom>
+        </p:spPr>
+        <p:txBody>
+          <a:bodyPr vert="horz" lIns="91440" tIns="45720" rIns="91440" bIns="45720" rtlCol="0"/>
+          <a:lstStyle>
+            <a:lvl1pPr algn="r">
+              <a:defRPr sz="1200"/>
+            </a:lvl1pPr>
+          </a:lstStyle>
+          <a:p>
+            <a:fld id="{A0EC9868-0A20-004D-A863-27AA0DE92D23}" type="datetimeFigureOut">
+              <a:rPr lang="fr-FR" smtClean="0"/>
+              <a:t>23/07/2025</a:t>
+            </a:fld>
+            <a:endParaRPr lang="fr-FR"/>
+          </a:p>
+        </p:txBody>
+      </p:sp>
+      <p:sp>
+        <p:nvSpPr>
+          <p:cNvPr id="4" name="Espace réservé de l'image des diapositives 3"/>
+          <p:cNvSpPr>
+            <a:spLocks noGrp="1" noRot="1" noChangeAspect="1"/>
+          </p:cNvSpPr>
+          <p:nvPr>
+            <p:ph type="sldImg" idx="2"/>
+          </p:nvPr>
+        </p:nvSpPr>
+        <p:spPr>
+          <a:xfrm>
+            <a:off x="149225" y="1143000"/>
+            <a:ext cx="6559550" cy="3086100"/>
+          </a:xfrm>
+          <a:prstGeom prst="rect">
+            <a:avLst/>
+          </a:prstGeom>
+          <a:noFill/>
+          <a:ln w="12700">
+            <a:solidFill>
+              <a:prstClr val="black"/>
+            </a:solidFill>
+          </a:ln>
+        </p:spPr>
+        <p:txBody>
+          <a:bodyPr vert="horz" lIns="91440" tIns="45720" rIns="91440" bIns="45720" rtlCol="0" anchor="ctr"/>
+          <a:lstStyle/>
+          <a:p>
+            <a:endParaRPr lang="fr-FR"/>
+          </a:p>
+        </p:txBody>
+      </p:sp>
+      <p:sp>
+        <p:nvSpPr>
+          <p:cNvPr id="5" name="Espace réservé des notes 4"/>
+          <p:cNvSpPr>
+            <a:spLocks noGrp="1"/>
+          </p:cNvSpPr>
+          <p:nvPr>
+            <p:ph type="body" sz="quarter" idx="3"/>
+          </p:nvPr>
+        </p:nvSpPr>
+        <p:spPr>
+          <a:xfrm>
+            <a:off x="685800" y="4400550"/>
+            <a:ext cx="5486400" cy="3600450"/>
+          </a:xfrm>
+          <a:prstGeom prst="rect">
+            <a:avLst/>
+          </a:prstGeom>
+        </p:spPr>
+        <p:txBody>
+          <a:bodyPr vert="horz" lIns="91440" tIns="45720" rIns="91440" bIns="45720" rtlCol="0"/>
+          <a:lstStyle/>
+          <a:p>
+            <a:pPr lvl="0"/>
+            <a:r>
+              <a:rPr lang="fr-FR"/>
+              <a:t>Cliquez pour modifier les styles du texte du masque</a:t>
+            </a:r>
+          </a:p>
+          <a:p>
+            <a:pPr lvl="1"/>
+            <a:r>
+              <a:rPr lang="fr-FR"/>
+              <a:t>Deuxième niveau</a:t>
+            </a:r>
+          </a:p>
+          <a:p>
+            <a:pPr lvl="2"/>
+            <a:r>
+              <a:rPr lang="fr-FR"/>
+              <a:t>Troisième niveau</a:t>
+            </a:r>
+          </a:p>
+          <a:p>
+            <a:pPr lvl="3"/>
+            <a:r>
+              <a:rPr lang="fr-FR"/>
+              <a:t>Quatrième niveau</a:t>
+            </a:r>
+          </a:p>
+          <a:p>
+            <a:pPr lvl="4"/>
+            <a:r>
+              <a:rPr lang="fr-FR"/>
+              <a:t>Cinquième niveau</a:t>
+            </a:r>
+          </a:p>
+        </p:txBody>
+      </p:sp>
+      <p:sp>
+        <p:nvSpPr>
+          <p:cNvPr id="6" name="Espace réservé du pied de page 5"/>
+          <p:cNvSpPr>
+            <a:spLocks noGrp="1"/>
+          </p:cNvSpPr>
+          <p:nvPr>
+            <p:ph type="ftr" sz="quarter" idx="4"/>
+          </p:nvPr>
+        </p:nvSpPr>
+        <p:spPr>
+          <a:xfrm>
+            <a:off x="0" y="8685213"/>
+            <a:ext cx="2971800" cy="458787"/>
+          </a:xfrm>
+          <a:prstGeom prst="rect">
+            <a:avLst/>
+          </a:prstGeom>
+        </p:spPr>
+        <p:txBody>
+          <a:bodyPr vert="horz" lIns="91440" tIns="45720" rIns="91440" bIns="45720" rtlCol="0" anchor="b"/>
+          <a:lstStyle>
+            <a:lvl1pPr algn="l">
+              <a:defRPr sz="1200"/>
+            </a:lvl1pPr>
+          </a:lstStyle>
+          <a:p>
+            <a:endParaRPr lang="fr-FR"/>
+          </a:p>
+        </p:txBody>
+      </p:sp>
+      <p:sp>
+        <p:nvSpPr>
+          <p:cNvPr id="7" name="Espace réservé du numéro de diapositive 6"/>
+          <p:cNvSpPr>
+            <a:spLocks noGrp="1"/>
+          </p:cNvSpPr>
+          <p:nvPr>
+            <p:ph type="sldNum" sz="quarter" idx="5"/>
+          </p:nvPr>
+        </p:nvSpPr>
+        <p:spPr>
+          <a:xfrm>
+            <a:off x="3884613" y="8685213"/>
+            <a:ext cx="2971800" cy="458787"/>
+          </a:xfrm>
+          <a:prstGeom prst="rect">
+            <a:avLst/>
+          </a:prstGeom>
+        </p:spPr>
+        <p:txBody>
+          <a:bodyPr vert="horz" lIns="91440" tIns="45720" rIns="91440" bIns="45720" rtlCol="0" anchor="b"/>
+          <a:lstStyle>
+            <a:lvl1pPr algn="r">
+              <a:defRPr sz="1200"/>
+            </a:lvl1pPr>
+          </a:lstStyle>
+          <a:p>
+            <a:fld id="{A6E76D2B-F50F-994B-AFFD-0F15C1DAF330}" type="slidenum">
+              <a:rPr lang="fr-FR" smtClean="0"/>
+              <a:t>‹N°›</a:t>
+            </a:fld>
+            <a:endParaRPr lang="fr-FR"/>
+          </a:p>
+        </p:txBody>
+      </p:sp>
+    </p:spTree>
+    <p:extLst>
+      <p:ext uri="{BB962C8B-B14F-4D97-AF65-F5344CB8AC3E}">
+        <p14:creationId xmlns:p14="http://schemas.microsoft.com/office/powerpoint/2010/main" val="1938696835"/>
+      </p:ext>
+    </p:extLst>
+  </p:cSld>
+  <p:clrMap bg1="lt1" tx1="dk1" bg2="lt2" tx2="dk2" accent1="accent1" accent2="accent2" accent3="accent3" accent4="accent4" accent5="accent5" accent6="accent6" hlink="hlink" folHlink="folHlink"/>
+  <p:notesStyle>
+    <a:lvl1pPr marL="0" algn="l" defTabSz="914400" rtl="0" eaLnBrk="1" latinLnBrk="0" hangingPunct="1">
+      <a:defRPr sz="1200" kern="1200">
+        <a:solidFill>
+          <a:schemeClr val="tx1"/>
+        </a:solidFill>
+        <a:latin typeface="+mn-lt"/>
+        <a:ea typeface="+mn-ea"/>
+        <a:cs typeface="+mn-cs"/>
+      </a:defRPr>
+    </a:lvl1pPr>
+    <a:lvl2pPr marL="457200" algn="l" defTabSz="914400" rtl="0" eaLnBrk="1" latinLnBrk="0" hangingPunct="1">
+      <a:defRPr sz="1200" kern="1200">
+        <a:solidFill>
+          <a:schemeClr val="tx1"/>
+        </a:solidFill>
+        <a:latin typeface="+mn-lt"/>
+        <a:ea typeface="+mn-ea"/>
+        <a:cs typeface="+mn-cs"/>
+      </a:defRPr>
+    </a:lvl2pPr>
+    <a:lvl3pPr marL="914400" algn="l" defTabSz="914400" rtl="0" eaLnBrk="1" latinLnBrk="0" hangingPunct="1">
+      <a:defRPr sz="1200" kern="1200">
+        <a:solidFill>
+          <a:schemeClr val="tx1"/>
+        </a:solidFill>
+        <a:latin typeface="+mn-lt"/>
+        <a:ea typeface="+mn-ea"/>
+        <a:cs typeface="+mn-cs"/>
+      </a:defRPr>
+    </a:lvl3pPr>
+    <a:lvl4pPr marL="1371600" algn="l" defTabSz="914400" rtl="0" eaLnBrk="1" latinLnBrk="0" hangingPunct="1">
+      <a:defRPr sz="1200" kern="1200">
+        <a:solidFill>
+          <a:schemeClr val="tx1"/>
+        </a:solidFill>
+        <a:latin typeface="+mn-lt"/>
+        <a:ea typeface="+mn-ea"/>
+        <a:cs typeface="+mn-cs"/>
+      </a:defRPr>
+    </a:lvl4pPr>
+    <a:lvl5pPr marL="1828800" algn="l" defTabSz="914400" rtl="0" eaLnBrk="1" latinLnBrk="0" hangingPunct="1">
+      <a:defRPr sz="1200" kern="1200">
+        <a:solidFill>
+          <a:schemeClr val="tx1"/>
+        </a:solidFill>
+        <a:latin typeface="+mn-lt"/>
+        <a:ea typeface="+mn-ea"/>
+        <a:cs typeface="+mn-cs"/>
+      </a:defRPr>
+    </a:lvl5pPr>
+    <a:lvl6pPr marL="2286000" algn="l" defTabSz="914400" rtl="0" eaLnBrk="1" latinLnBrk="0" hangingPunct="1">
+      <a:defRPr sz="1200" kern="1200">
+        <a:solidFill>
+          <a:schemeClr val="tx1"/>
+        </a:solidFill>
+        <a:latin typeface="+mn-lt"/>
+        <a:ea typeface="+mn-ea"/>
+        <a:cs typeface="+mn-cs"/>
+      </a:defRPr>
+    </a:lvl6pPr>
+    <a:lvl7pPr marL="2743200" algn="l" defTabSz="914400" rtl="0" eaLnBrk="1" latinLnBrk="0" hangingPunct="1">
+      <a:defRPr sz="1200" kern="1200">
+        <a:solidFill>
+          <a:schemeClr val="tx1"/>
+        </a:solidFill>
+        <a:latin typeface="+mn-lt"/>
+        <a:ea typeface="+mn-ea"/>
+        <a:cs typeface="+mn-cs"/>
+      </a:defRPr>
+    </a:lvl7pPr>
+    <a:lvl8pPr marL="3200400" algn="l" defTabSz="914400" rtl="0" eaLnBrk="1" latinLnBrk="0" hangingPunct="1">
+      <a:defRPr sz="1200" kern="1200">
+        <a:solidFill>
+          <a:schemeClr val="tx1"/>
+        </a:solidFill>
+        <a:latin typeface="+mn-lt"/>
+        <a:ea typeface="+mn-ea"/>
+        <a:cs typeface="+mn-cs"/>
+      </a:defRPr>
+    </a:lvl8pPr>
+    <a:lvl9pPr marL="3657600" algn="l" defTabSz="914400" rtl="0" eaLnBrk="1" latinLnBrk="0" hangingPunct="1">
+      <a:defRPr sz="1200" kern="1200">
+        <a:solidFill>
+          <a:schemeClr val="tx1"/>
+        </a:solidFill>
+        <a:latin typeface="+mn-lt"/>
+        <a:ea typeface="+mn-ea"/>
+        <a:cs typeface="+mn-cs"/>
+      </a:defRPr>
+    </a:lvl9pPr>
+  </p:notesStyle>
+</p:notesMaster>
+</file>
+
+<file path=ppt/notesSlides/notesSlide1.xml><?xml version="1.0" encoding="utf-8"?>
+<p:notes xmlns:a="http://schemas.openxmlformats.org/drawingml/2006/main" xmlns:r="http://schemas.openxmlformats.org/officeDocument/2006/relationships" xmlns:p="http://schemas.openxmlformats.org/presentationml/2006/main">
+  <p:cSld>
+    <p:spTree>
+      <p:nvGrpSpPr>
+        <p:cNvPr id="1" name=""/>
+        <p:cNvGrpSpPr/>
+        <p:nvPr/>
+      </p:nvGrpSpPr>
+      <p:grpSpPr>
+        <a:xfrm>
+          <a:off x="0" y="0"/>
+          <a:ext cx="0" cy="0"/>
+          <a:chOff x="0" y="0"/>
+          <a:chExt cx="0" cy="0"/>
+        </a:xfrm>
+      </p:grpSpPr>
+      <p:sp>
+        <p:nvSpPr>
+          <p:cNvPr id="2" name="Espace réservé de l'image des diapositives 1"/>
+          <p:cNvSpPr>
+            <a:spLocks noGrp="1" noRot="1" noChangeAspect="1"/>
+          </p:cNvSpPr>
+          <p:nvPr>
+            <p:ph type="sldImg"/>
+          </p:nvPr>
+        </p:nvSpPr>
+        <p:spPr/>
+      </p:sp>
+      <p:sp>
+        <p:nvSpPr>
+          <p:cNvPr id="3" name="Espace réservé des notes 2"/>
+          <p:cNvSpPr>
+            <a:spLocks noGrp="1"/>
+          </p:cNvSpPr>
+          <p:nvPr>
+            <p:ph type="body" idx="1"/>
+          </p:nvPr>
+        </p:nvSpPr>
+        <p:spPr/>
+        <p:txBody>
+          <a:bodyPr/>
+          <a:lstStyle/>
+          <a:p>
+            <a:endParaRPr lang="fr-FR" dirty="0"/>
+          </a:p>
+        </p:txBody>
+      </p:sp>
+      <p:sp>
+        <p:nvSpPr>
+          <p:cNvPr id="4" name="Espace réservé du numéro de diapositive 3"/>
+          <p:cNvSpPr>
+            <a:spLocks noGrp="1"/>
+          </p:cNvSpPr>
+          <p:nvPr>
+            <p:ph type="sldNum" sz="quarter" idx="5"/>
+          </p:nvPr>
+        </p:nvSpPr>
+        <p:spPr/>
+        <p:txBody>
+          <a:bodyPr/>
+          <a:lstStyle/>
+          <a:p>
+            <a:fld id="{A6E76D2B-F50F-994B-AFFD-0F15C1DAF330}" type="slidenum">
+              <a:rPr lang="fr-FR" smtClean="0"/>
+              <a:t>1</a:t>
+            </a:fld>
+            <a:endParaRPr lang="fr-FR"/>
+          </a:p>
+        </p:txBody>
+      </p:sp>
+    </p:spTree>
+    <p:extLst>
+      <p:ext uri="{BB962C8B-B14F-4D97-AF65-F5344CB8AC3E}">
+        <p14:creationId xmlns:p14="http://schemas.microsoft.com/office/powerpoint/2010/main" val="2537684326"/>
+      </p:ext>
+    </p:extLst>
+  </p:cSld>
+  <p:clrMapOvr>
+    <a:masterClrMapping/>
+  </p:clrMapOvr>
+</p:notes>
+</file>
+
 <file path=ppt/slideLayouts/slideLayout1.xml><?xml version="1.0" encoding="utf-8"?>
 <p:sldLayout xmlns:a="http://schemas.openxmlformats.org/drawingml/2006/main" xmlns:r="http://schemas.openxmlformats.org/officeDocument/2006/relationships" xmlns:p="http://schemas.openxmlformats.org/presentationml/2006/main" type="title" preserve="1">
   <p:cSld name="Diapositive de titre">
@@ -141,15 +577,15 @@
         </p:nvSpPr>
         <p:spPr>
           <a:xfrm>
-            <a:off x="382588" y="265002"/>
-            <a:ext cx="2295525" cy="563739"/>
+            <a:off x="382588" y="235644"/>
+            <a:ext cx="2295525" cy="501286"/>
           </a:xfrm>
         </p:spPr>
         <p:txBody>
           <a:bodyPr anchor="b"/>
           <a:lstStyle>
             <a:lvl1pPr algn="ctr">
-              <a:defRPr sz="1417"/>
+              <a:defRPr sz="1260"/>
             </a:lvl1pPr>
           </a:lstStyle>
           <a:p>
@@ -173,8 +609,8 @@
         </p:nvSpPr>
         <p:spPr>
           <a:xfrm>
-            <a:off x="382588" y="850481"/>
-            <a:ext cx="2295525" cy="390944"/>
+            <a:off x="382588" y="756262"/>
+            <a:ext cx="2295525" cy="347633"/>
           </a:xfrm>
         </p:spPr>
         <p:txBody>
@@ -182,39 +618,39 @@
           <a:lstStyle>
             <a:lvl1pPr marL="0" indent="0" algn="ctr">
               <a:buNone/>
-              <a:defRPr sz="567"/>
+              <a:defRPr sz="504"/>
             </a:lvl1pPr>
-            <a:lvl2pPr marL="107945" indent="0" algn="ctr">
-              <a:buNone/>
-              <a:defRPr sz="472"/>
+            <a:lvl2pPr marL="96012" indent="0" algn="ctr">
+              <a:buNone/>
+              <a:defRPr sz="420"/>
             </a:lvl2pPr>
-            <a:lvl3pPr marL="215890" indent="0" algn="ctr">
-              <a:buNone/>
-              <a:defRPr sz="425"/>
+            <a:lvl3pPr marL="192024" indent="0" algn="ctr">
+              <a:buNone/>
+              <a:defRPr sz="378"/>
             </a:lvl3pPr>
-            <a:lvl4pPr marL="323835" indent="0" algn="ctr">
-              <a:buNone/>
-              <a:defRPr sz="378"/>
+            <a:lvl4pPr marL="288036" indent="0" algn="ctr">
+              <a:buNone/>
+              <a:defRPr sz="336"/>
             </a:lvl4pPr>
-            <a:lvl5pPr marL="431780" indent="0" algn="ctr">
-              <a:buNone/>
-              <a:defRPr sz="378"/>
+            <a:lvl5pPr marL="384048" indent="0" algn="ctr">
+              <a:buNone/>
+              <a:defRPr sz="336"/>
             </a:lvl5pPr>
-            <a:lvl6pPr marL="539725" indent="0" algn="ctr">
-              <a:buNone/>
-              <a:defRPr sz="378"/>
+            <a:lvl6pPr marL="480060" indent="0" algn="ctr">
+              <a:buNone/>
+              <a:defRPr sz="336"/>
             </a:lvl6pPr>
-            <a:lvl7pPr marL="647670" indent="0" algn="ctr">
-              <a:buNone/>
-              <a:defRPr sz="378"/>
+            <a:lvl7pPr marL="576072" indent="0" algn="ctr">
+              <a:buNone/>
+              <a:defRPr sz="336"/>
             </a:lvl7pPr>
-            <a:lvl8pPr marL="755614" indent="0" algn="ctr">
-              <a:buNone/>
-              <a:defRPr sz="378"/>
+            <a:lvl8pPr marL="672084" indent="0" algn="ctr">
+              <a:buNone/>
+              <a:defRPr sz="336"/>
             </a:lvl8pPr>
-            <a:lvl9pPr marL="863559" indent="0" algn="ctr">
-              <a:buNone/>
-              <a:defRPr sz="378"/>
+            <a:lvl9pPr marL="768096" indent="0" algn="ctr">
+              <a:buNone/>
+              <a:defRPr sz="336"/>
             </a:lvl9pPr>
           </a:lstStyle>
           <a:p>
@@ -243,7 +679,7 @@
           <a:p>
             <a:fld id="{ED160DB6-C0DC-8946-AD05-C0754294CFDE}" type="datetimeFigureOut">
               <a:rPr lang="fr-FR" smtClean="0"/>
-              <a:t>17/07/2025</a:t>
+              <a:t>23/07/2025</a:t>
             </a:fld>
             <a:endParaRPr lang="fr-FR"/>
           </a:p>
@@ -294,7 +730,7 @@
     </p:spTree>
     <p:extLst>
       <p:ext uri="{BB962C8B-B14F-4D97-AF65-F5344CB8AC3E}">
-        <p14:creationId xmlns:p14="http://schemas.microsoft.com/office/powerpoint/2010/main" val="1088683528"/>
+        <p14:creationId xmlns:p14="http://schemas.microsoft.com/office/powerpoint/2010/main" val="17207646"/>
       </p:ext>
     </p:extLst>
   </p:cSld>
@@ -413,7 +849,7 @@
           <a:p>
             <a:fld id="{ED160DB6-C0DC-8946-AD05-C0754294CFDE}" type="datetimeFigureOut">
               <a:rPr lang="fr-FR" smtClean="0"/>
-              <a:t>17/07/2025</a:t>
+              <a:t>23/07/2025</a:t>
             </a:fld>
             <a:endParaRPr lang="fr-FR"/>
           </a:p>
@@ -464,7 +900,7 @@
     </p:spTree>
     <p:extLst>
       <p:ext uri="{BB962C8B-B14F-4D97-AF65-F5344CB8AC3E}">
-        <p14:creationId xmlns:p14="http://schemas.microsoft.com/office/powerpoint/2010/main" val="3932706428"/>
+        <p14:creationId xmlns:p14="http://schemas.microsoft.com/office/powerpoint/2010/main" val="1772035421"/>
       </p:ext>
     </p:extLst>
   </p:cSld>
@@ -503,8 +939,8 @@
         </p:nvSpPr>
         <p:spPr>
           <a:xfrm>
-            <a:off x="2190314" y="86210"/>
-            <a:ext cx="659963" cy="1372240"/>
+            <a:off x="2190314" y="76660"/>
+            <a:ext cx="659963" cy="1220217"/>
           </a:xfrm>
         </p:spPr>
         <p:txBody>
@@ -531,8 +967,8 @@
         </p:nvSpPr>
         <p:spPr>
           <a:xfrm>
-            <a:off x="210423" y="86210"/>
-            <a:ext cx="1941632" cy="1372240"/>
+            <a:off x="210423" y="76660"/>
+            <a:ext cx="1941632" cy="1220217"/>
           </a:xfrm>
         </p:spPr>
         <p:txBody>
@@ -593,7 +1029,7 @@
           <a:p>
             <a:fld id="{ED160DB6-C0DC-8946-AD05-C0754294CFDE}" type="datetimeFigureOut">
               <a:rPr lang="fr-FR" smtClean="0"/>
-              <a:t>17/07/2025</a:t>
+              <a:t>23/07/2025</a:t>
             </a:fld>
             <a:endParaRPr lang="fr-FR"/>
           </a:p>
@@ -644,7 +1080,7 @@
     </p:spTree>
     <p:extLst>
       <p:ext uri="{BB962C8B-B14F-4D97-AF65-F5344CB8AC3E}">
-        <p14:creationId xmlns:p14="http://schemas.microsoft.com/office/powerpoint/2010/main" val="3228330337"/>
+        <p14:creationId xmlns:p14="http://schemas.microsoft.com/office/powerpoint/2010/main" val="1103391969"/>
       </p:ext>
     </p:extLst>
   </p:cSld>
@@ -763,7 +1199,7 @@
           <a:p>
             <a:fld id="{ED160DB6-C0DC-8946-AD05-C0754294CFDE}" type="datetimeFigureOut">
               <a:rPr lang="fr-FR" smtClean="0"/>
-              <a:t>17/07/2025</a:t>
+              <a:t>23/07/2025</a:t>
             </a:fld>
             <a:endParaRPr lang="fr-FR"/>
           </a:p>
@@ -814,7 +1250,7 @@
     </p:spTree>
     <p:extLst>
       <p:ext uri="{BB962C8B-B14F-4D97-AF65-F5344CB8AC3E}">
-        <p14:creationId xmlns:p14="http://schemas.microsoft.com/office/powerpoint/2010/main" val="1746121305"/>
+        <p14:creationId xmlns:p14="http://schemas.microsoft.com/office/powerpoint/2010/main" val="724032284"/>
       </p:ext>
     </p:extLst>
   </p:cSld>
@@ -853,15 +1289,15 @@
         </p:nvSpPr>
         <p:spPr>
           <a:xfrm>
-            <a:off x="208829" y="403688"/>
-            <a:ext cx="2639854" cy="673563"/>
+            <a:off x="208829" y="358966"/>
+            <a:ext cx="2639854" cy="598943"/>
           </a:xfrm>
         </p:spPr>
         <p:txBody>
           <a:bodyPr anchor="b"/>
           <a:lstStyle>
             <a:lvl1pPr>
-              <a:defRPr sz="1417"/>
+              <a:defRPr sz="1260"/>
             </a:lvl1pPr>
           </a:lstStyle>
           <a:p>
@@ -885,8 +1321,8 @@
         </p:nvSpPr>
         <p:spPr>
           <a:xfrm>
-            <a:off x="208829" y="1083623"/>
-            <a:ext cx="2639854" cy="354211"/>
+            <a:off x="208829" y="963575"/>
+            <a:ext cx="2639854" cy="314970"/>
           </a:xfrm>
         </p:spPr>
         <p:txBody>
@@ -894,7 +1330,7 @@
           <a:lstStyle>
             <a:lvl1pPr marL="0" indent="0">
               <a:buNone/>
-              <a:defRPr sz="567">
+              <a:defRPr sz="504">
                 <a:solidFill>
                   <a:schemeClr val="tx1">
                     <a:tint val="75000"/>
@@ -902,9 +1338,9 @@
                 </a:solidFill>
               </a:defRPr>
             </a:lvl1pPr>
-            <a:lvl2pPr marL="107945" indent="0">
-              <a:buNone/>
-              <a:defRPr sz="472">
+            <a:lvl2pPr marL="96012" indent="0">
+              <a:buNone/>
+              <a:defRPr sz="420">
                 <a:solidFill>
                   <a:schemeClr val="tx1">
                     <a:tint val="75000"/>
@@ -912,9 +1348,9 @@
                 </a:solidFill>
               </a:defRPr>
             </a:lvl2pPr>
-            <a:lvl3pPr marL="215890" indent="0">
-              <a:buNone/>
-              <a:defRPr sz="425">
+            <a:lvl3pPr marL="192024" indent="0">
+              <a:buNone/>
+              <a:defRPr sz="378">
                 <a:solidFill>
                   <a:schemeClr val="tx1">
                     <a:tint val="75000"/>
@@ -922,9 +1358,9 @@
                 </a:solidFill>
               </a:defRPr>
             </a:lvl3pPr>
-            <a:lvl4pPr marL="323835" indent="0">
-              <a:buNone/>
-              <a:defRPr sz="378">
+            <a:lvl4pPr marL="288036" indent="0">
+              <a:buNone/>
+              <a:defRPr sz="336">
                 <a:solidFill>
                   <a:schemeClr val="tx1">
                     <a:tint val="75000"/>
@@ -932,9 +1368,9 @@
                 </a:solidFill>
               </a:defRPr>
             </a:lvl4pPr>
-            <a:lvl5pPr marL="431780" indent="0">
-              <a:buNone/>
-              <a:defRPr sz="378">
+            <a:lvl5pPr marL="384048" indent="0">
+              <a:buNone/>
+              <a:defRPr sz="336">
                 <a:solidFill>
                   <a:schemeClr val="tx1">
                     <a:tint val="75000"/>
@@ -942,9 +1378,9 @@
                 </a:solidFill>
               </a:defRPr>
             </a:lvl5pPr>
-            <a:lvl6pPr marL="539725" indent="0">
-              <a:buNone/>
-              <a:defRPr sz="378">
+            <a:lvl6pPr marL="480060" indent="0">
+              <a:buNone/>
+              <a:defRPr sz="336">
                 <a:solidFill>
                   <a:schemeClr val="tx1">
                     <a:tint val="75000"/>
@@ -952,9 +1388,9 @@
                 </a:solidFill>
               </a:defRPr>
             </a:lvl6pPr>
-            <a:lvl7pPr marL="647670" indent="0">
-              <a:buNone/>
-              <a:defRPr sz="378">
+            <a:lvl7pPr marL="576072" indent="0">
+              <a:buNone/>
+              <a:defRPr sz="336">
                 <a:solidFill>
                   <a:schemeClr val="tx1">
                     <a:tint val="75000"/>
@@ -962,9 +1398,9 @@
                 </a:solidFill>
               </a:defRPr>
             </a:lvl7pPr>
-            <a:lvl8pPr marL="755614" indent="0">
-              <a:buNone/>
-              <a:defRPr sz="378">
+            <a:lvl8pPr marL="672084" indent="0">
+              <a:buNone/>
+              <a:defRPr sz="336">
                 <a:solidFill>
                   <a:schemeClr val="tx1">
                     <a:tint val="75000"/>
@@ -972,9 +1408,9 @@
                 </a:solidFill>
               </a:defRPr>
             </a:lvl8pPr>
-            <a:lvl9pPr marL="863559" indent="0">
-              <a:buNone/>
-              <a:defRPr sz="378">
+            <a:lvl9pPr marL="768096" indent="0">
+              <a:buNone/>
+              <a:defRPr sz="336">
                 <a:solidFill>
                   <a:schemeClr val="tx1">
                     <a:tint val="75000"/>
@@ -1009,7 +1445,7 @@
           <a:p>
             <a:fld id="{ED160DB6-C0DC-8946-AD05-C0754294CFDE}" type="datetimeFigureOut">
               <a:rPr lang="fr-FR" smtClean="0"/>
-              <a:t>17/07/2025</a:t>
+              <a:t>23/07/2025</a:t>
             </a:fld>
             <a:endParaRPr lang="fr-FR"/>
           </a:p>
@@ -1060,7 +1496,7 @@
     </p:spTree>
     <p:extLst>
       <p:ext uri="{BB962C8B-B14F-4D97-AF65-F5344CB8AC3E}">
-        <p14:creationId xmlns:p14="http://schemas.microsoft.com/office/powerpoint/2010/main" val="2190638694"/>
+        <p14:creationId xmlns:p14="http://schemas.microsoft.com/office/powerpoint/2010/main" val="4044854753"/>
       </p:ext>
     </p:extLst>
   </p:cSld>
@@ -1122,8 +1558,8 @@
         </p:nvSpPr>
         <p:spPr>
           <a:xfrm>
-            <a:off x="210423" y="431050"/>
-            <a:ext cx="1300798" cy="1027399"/>
+            <a:off x="210423" y="383297"/>
+            <a:ext cx="1300798" cy="913580"/>
           </a:xfrm>
         </p:spPr>
         <p:txBody>
@@ -1179,8 +1615,8 @@
         </p:nvSpPr>
         <p:spPr>
           <a:xfrm>
-            <a:off x="1549479" y="431050"/>
-            <a:ext cx="1300798" cy="1027399"/>
+            <a:off x="1549479" y="383297"/>
+            <a:ext cx="1300798" cy="913580"/>
           </a:xfrm>
         </p:spPr>
         <p:txBody>
@@ -1241,7 +1677,7 @@
           <a:p>
             <a:fld id="{ED160DB6-C0DC-8946-AD05-C0754294CFDE}" type="datetimeFigureOut">
               <a:rPr lang="fr-FR" smtClean="0"/>
-              <a:t>17/07/2025</a:t>
+              <a:t>23/07/2025</a:t>
             </a:fld>
             <a:endParaRPr lang="fr-FR"/>
           </a:p>
@@ -1292,7 +1728,7 @@
     </p:spTree>
     <p:extLst>
       <p:ext uri="{BB962C8B-B14F-4D97-AF65-F5344CB8AC3E}">
-        <p14:creationId xmlns:p14="http://schemas.microsoft.com/office/powerpoint/2010/main" val="1968089501"/>
+        <p14:creationId xmlns:p14="http://schemas.microsoft.com/office/powerpoint/2010/main" val="16955504"/>
       </p:ext>
     </p:extLst>
   </p:cSld>
@@ -1331,8 +1767,8 @@
         </p:nvSpPr>
         <p:spPr>
           <a:xfrm>
-            <a:off x="210822" y="86210"/>
-            <a:ext cx="2639854" cy="312980"/>
+            <a:off x="210822" y="76659"/>
+            <a:ext cx="2639854" cy="278307"/>
           </a:xfrm>
         </p:spPr>
         <p:txBody>
@@ -1359,8 +1795,8 @@
         </p:nvSpPr>
         <p:spPr>
           <a:xfrm>
-            <a:off x="210822" y="396941"/>
-            <a:ext cx="1294819" cy="194535"/>
+            <a:off x="210822" y="352967"/>
+            <a:ext cx="1294819" cy="172983"/>
           </a:xfrm>
         </p:spPr>
         <p:txBody>
@@ -1368,39 +1804,39 @@
           <a:lstStyle>
             <a:lvl1pPr marL="0" indent="0">
               <a:buNone/>
-              <a:defRPr sz="567" b="1"/>
+              <a:defRPr sz="504" b="1"/>
             </a:lvl1pPr>
-            <a:lvl2pPr marL="107945" indent="0">
-              <a:buNone/>
-              <a:defRPr sz="472" b="1"/>
+            <a:lvl2pPr marL="96012" indent="0">
+              <a:buNone/>
+              <a:defRPr sz="420" b="1"/>
             </a:lvl2pPr>
-            <a:lvl3pPr marL="215890" indent="0">
-              <a:buNone/>
-              <a:defRPr sz="425" b="1"/>
+            <a:lvl3pPr marL="192024" indent="0">
+              <a:buNone/>
+              <a:defRPr sz="378" b="1"/>
             </a:lvl3pPr>
-            <a:lvl4pPr marL="323835" indent="0">
-              <a:buNone/>
-              <a:defRPr sz="378" b="1"/>
+            <a:lvl4pPr marL="288036" indent="0">
+              <a:buNone/>
+              <a:defRPr sz="336" b="1"/>
             </a:lvl4pPr>
-            <a:lvl5pPr marL="431780" indent="0">
-              <a:buNone/>
-              <a:defRPr sz="378" b="1"/>
+            <a:lvl5pPr marL="384048" indent="0">
+              <a:buNone/>
+              <a:defRPr sz="336" b="1"/>
             </a:lvl5pPr>
-            <a:lvl6pPr marL="539725" indent="0">
-              <a:buNone/>
-              <a:defRPr sz="378" b="1"/>
+            <a:lvl6pPr marL="480060" indent="0">
+              <a:buNone/>
+              <a:defRPr sz="336" b="1"/>
             </a:lvl6pPr>
-            <a:lvl7pPr marL="647670" indent="0">
-              <a:buNone/>
-              <a:defRPr sz="378" b="1"/>
+            <a:lvl7pPr marL="576072" indent="0">
+              <a:buNone/>
+              <a:defRPr sz="336" b="1"/>
             </a:lvl7pPr>
-            <a:lvl8pPr marL="755614" indent="0">
-              <a:buNone/>
-              <a:defRPr sz="378" b="1"/>
+            <a:lvl8pPr marL="672084" indent="0">
+              <a:buNone/>
+              <a:defRPr sz="336" b="1"/>
             </a:lvl8pPr>
-            <a:lvl9pPr marL="863559" indent="0">
-              <a:buNone/>
-              <a:defRPr sz="378" b="1"/>
+            <a:lvl9pPr marL="768096" indent="0">
+              <a:buNone/>
+              <a:defRPr sz="336" b="1"/>
             </a:lvl9pPr>
           </a:lstStyle>
           <a:p>
@@ -1424,8 +1860,8 @@
         </p:nvSpPr>
         <p:spPr>
           <a:xfrm>
-            <a:off x="210822" y="591476"/>
-            <a:ext cx="1294819" cy="869972"/>
+            <a:off x="210822" y="525950"/>
+            <a:ext cx="1294819" cy="773593"/>
           </a:xfrm>
         </p:spPr>
         <p:txBody>
@@ -1481,8 +1917,8 @@
         </p:nvSpPr>
         <p:spPr>
           <a:xfrm>
-            <a:off x="1549479" y="396941"/>
-            <a:ext cx="1301196" cy="194535"/>
+            <a:off x="1549479" y="352967"/>
+            <a:ext cx="1301196" cy="172983"/>
           </a:xfrm>
         </p:spPr>
         <p:txBody>
@@ -1490,39 +1926,39 @@
           <a:lstStyle>
             <a:lvl1pPr marL="0" indent="0">
               <a:buNone/>
-              <a:defRPr sz="567" b="1"/>
+              <a:defRPr sz="504" b="1"/>
             </a:lvl1pPr>
-            <a:lvl2pPr marL="107945" indent="0">
-              <a:buNone/>
-              <a:defRPr sz="472" b="1"/>
+            <a:lvl2pPr marL="96012" indent="0">
+              <a:buNone/>
+              <a:defRPr sz="420" b="1"/>
             </a:lvl2pPr>
-            <a:lvl3pPr marL="215890" indent="0">
-              <a:buNone/>
-              <a:defRPr sz="425" b="1"/>
+            <a:lvl3pPr marL="192024" indent="0">
+              <a:buNone/>
+              <a:defRPr sz="378" b="1"/>
             </a:lvl3pPr>
-            <a:lvl4pPr marL="323835" indent="0">
-              <a:buNone/>
-              <a:defRPr sz="378" b="1"/>
+            <a:lvl4pPr marL="288036" indent="0">
+              <a:buNone/>
+              <a:defRPr sz="336" b="1"/>
             </a:lvl4pPr>
-            <a:lvl5pPr marL="431780" indent="0">
-              <a:buNone/>
-              <a:defRPr sz="378" b="1"/>
+            <a:lvl5pPr marL="384048" indent="0">
+              <a:buNone/>
+              <a:defRPr sz="336" b="1"/>
             </a:lvl5pPr>
-            <a:lvl6pPr marL="539725" indent="0">
-              <a:buNone/>
-              <a:defRPr sz="378" b="1"/>
+            <a:lvl6pPr marL="480060" indent="0">
+              <a:buNone/>
+              <a:defRPr sz="336" b="1"/>
             </a:lvl6pPr>
-            <a:lvl7pPr marL="647670" indent="0">
-              <a:buNone/>
-              <a:defRPr sz="378" b="1"/>
+            <a:lvl7pPr marL="576072" indent="0">
+              <a:buNone/>
+              <a:defRPr sz="336" b="1"/>
             </a:lvl7pPr>
-            <a:lvl8pPr marL="755614" indent="0">
-              <a:buNone/>
-              <a:defRPr sz="378" b="1"/>
+            <a:lvl8pPr marL="672084" indent="0">
+              <a:buNone/>
+              <a:defRPr sz="336" b="1"/>
             </a:lvl8pPr>
-            <a:lvl9pPr marL="863559" indent="0">
-              <a:buNone/>
-              <a:defRPr sz="378" b="1"/>
+            <a:lvl9pPr marL="768096" indent="0">
+              <a:buNone/>
+              <a:defRPr sz="336" b="1"/>
             </a:lvl9pPr>
           </a:lstStyle>
           <a:p>
@@ -1546,8 +1982,8 @@
         </p:nvSpPr>
         <p:spPr>
           <a:xfrm>
-            <a:off x="1549479" y="591476"/>
-            <a:ext cx="1301196" cy="869972"/>
+            <a:off x="1549479" y="525950"/>
+            <a:ext cx="1301196" cy="773593"/>
           </a:xfrm>
         </p:spPr>
         <p:txBody>
@@ -1608,7 +2044,7 @@
           <a:p>
             <a:fld id="{ED160DB6-C0DC-8946-AD05-C0754294CFDE}" type="datetimeFigureOut">
               <a:rPr lang="fr-FR" smtClean="0"/>
-              <a:t>17/07/2025</a:t>
+              <a:t>23/07/2025</a:t>
             </a:fld>
             <a:endParaRPr lang="fr-FR"/>
           </a:p>
@@ -1659,7 +2095,7 @@
     </p:spTree>
     <p:extLst>
       <p:ext uri="{BB962C8B-B14F-4D97-AF65-F5344CB8AC3E}">
-        <p14:creationId xmlns:p14="http://schemas.microsoft.com/office/powerpoint/2010/main" val="2516343087"/>
+        <p14:creationId xmlns:p14="http://schemas.microsoft.com/office/powerpoint/2010/main" val="2621723921"/>
       </p:ext>
     </p:extLst>
   </p:cSld>
@@ -1726,7 +2162,7 @@
           <a:p>
             <a:fld id="{ED160DB6-C0DC-8946-AD05-C0754294CFDE}" type="datetimeFigureOut">
               <a:rPr lang="fr-FR" smtClean="0"/>
-              <a:t>17/07/2025</a:t>
+              <a:t>23/07/2025</a:t>
             </a:fld>
             <a:endParaRPr lang="fr-FR"/>
           </a:p>
@@ -1777,7 +2213,7 @@
     </p:spTree>
     <p:extLst>
       <p:ext uri="{BB962C8B-B14F-4D97-AF65-F5344CB8AC3E}">
-        <p14:creationId xmlns:p14="http://schemas.microsoft.com/office/powerpoint/2010/main" val="169900876"/>
+        <p14:creationId xmlns:p14="http://schemas.microsoft.com/office/powerpoint/2010/main" val="2725775289"/>
       </p:ext>
     </p:extLst>
   </p:cSld>
@@ -1821,7 +2257,7 @@
           <a:p>
             <a:fld id="{ED160DB6-C0DC-8946-AD05-C0754294CFDE}" type="datetimeFigureOut">
               <a:rPr lang="fr-FR" smtClean="0"/>
-              <a:t>17/07/2025</a:t>
+              <a:t>23/07/2025</a:t>
             </a:fld>
             <a:endParaRPr lang="fr-FR"/>
           </a:p>
@@ -1872,7 +2308,7 @@
     </p:spTree>
     <p:extLst>
       <p:ext uri="{BB962C8B-B14F-4D97-AF65-F5344CB8AC3E}">
-        <p14:creationId xmlns:p14="http://schemas.microsoft.com/office/powerpoint/2010/main" val="4017543199"/>
+        <p14:creationId xmlns:p14="http://schemas.microsoft.com/office/powerpoint/2010/main" val="1786784669"/>
       </p:ext>
     </p:extLst>
   </p:cSld>
@@ -1911,15 +2347,15 @@
         </p:nvSpPr>
         <p:spPr>
           <a:xfrm>
-            <a:off x="210822" y="107950"/>
-            <a:ext cx="987155" cy="377825"/>
+            <a:off x="210822" y="95991"/>
+            <a:ext cx="987155" cy="335968"/>
           </a:xfrm>
         </p:spPr>
         <p:txBody>
           <a:bodyPr anchor="b"/>
           <a:lstStyle>
             <a:lvl1pPr>
-              <a:defRPr sz="756"/>
+              <a:defRPr sz="672"/>
             </a:lvl1pPr>
           </a:lstStyle>
           <a:p>
@@ -1943,39 +2379,39 @@
         </p:nvSpPr>
         <p:spPr>
           <a:xfrm>
-            <a:off x="1301196" y="233142"/>
-            <a:ext cx="1549479" cy="1150717"/>
+            <a:off x="1301196" y="207314"/>
+            <a:ext cx="1549479" cy="1023236"/>
           </a:xfrm>
         </p:spPr>
         <p:txBody>
           <a:bodyPr/>
           <a:lstStyle>
             <a:lvl1pPr>
-              <a:defRPr sz="756"/>
+              <a:defRPr sz="672"/>
             </a:lvl1pPr>
             <a:lvl2pPr>
-              <a:defRPr sz="661"/>
+              <a:defRPr sz="588"/>
             </a:lvl2pPr>
             <a:lvl3pPr>
-              <a:defRPr sz="567"/>
+              <a:defRPr sz="504"/>
             </a:lvl3pPr>
             <a:lvl4pPr>
-              <a:defRPr sz="472"/>
+              <a:defRPr sz="420"/>
             </a:lvl4pPr>
             <a:lvl5pPr>
-              <a:defRPr sz="472"/>
+              <a:defRPr sz="420"/>
             </a:lvl5pPr>
             <a:lvl6pPr>
-              <a:defRPr sz="472"/>
+              <a:defRPr sz="420"/>
             </a:lvl6pPr>
             <a:lvl7pPr>
-              <a:defRPr sz="472"/>
+              <a:defRPr sz="420"/>
             </a:lvl7pPr>
             <a:lvl8pPr>
-              <a:defRPr sz="472"/>
+              <a:defRPr sz="420"/>
             </a:lvl8pPr>
             <a:lvl9pPr>
-              <a:defRPr sz="472"/>
+              <a:defRPr sz="420"/>
             </a:lvl9pPr>
           </a:lstStyle>
           <a:p>
@@ -2028,8 +2464,8 @@
         </p:nvSpPr>
         <p:spPr>
           <a:xfrm>
-            <a:off x="210822" y="485775"/>
-            <a:ext cx="987155" cy="899958"/>
+            <a:off x="210822" y="431959"/>
+            <a:ext cx="987155" cy="800257"/>
           </a:xfrm>
         </p:spPr>
         <p:txBody>
@@ -2037,39 +2473,39 @@
           <a:lstStyle>
             <a:lvl1pPr marL="0" indent="0">
               <a:buNone/>
-              <a:defRPr sz="378"/>
+              <a:defRPr sz="336"/>
             </a:lvl1pPr>
-            <a:lvl2pPr marL="107945" indent="0">
-              <a:buNone/>
-              <a:defRPr sz="331"/>
+            <a:lvl2pPr marL="96012" indent="0">
+              <a:buNone/>
+              <a:defRPr sz="294"/>
             </a:lvl2pPr>
-            <a:lvl3pPr marL="215890" indent="0">
-              <a:buNone/>
-              <a:defRPr sz="283"/>
+            <a:lvl3pPr marL="192024" indent="0">
+              <a:buNone/>
+              <a:defRPr sz="252"/>
             </a:lvl3pPr>
-            <a:lvl4pPr marL="323835" indent="0">
-              <a:buNone/>
-              <a:defRPr sz="236"/>
+            <a:lvl4pPr marL="288036" indent="0">
+              <a:buNone/>
+              <a:defRPr sz="210"/>
             </a:lvl4pPr>
-            <a:lvl5pPr marL="431780" indent="0">
-              <a:buNone/>
-              <a:defRPr sz="236"/>
+            <a:lvl5pPr marL="384048" indent="0">
+              <a:buNone/>
+              <a:defRPr sz="210"/>
             </a:lvl5pPr>
-            <a:lvl6pPr marL="539725" indent="0">
-              <a:buNone/>
-              <a:defRPr sz="236"/>
+            <a:lvl6pPr marL="480060" indent="0">
+              <a:buNone/>
+              <a:defRPr sz="210"/>
             </a:lvl6pPr>
-            <a:lvl7pPr marL="647670" indent="0">
-              <a:buNone/>
-              <a:defRPr sz="236"/>
+            <a:lvl7pPr marL="576072" indent="0">
+              <a:buNone/>
+              <a:defRPr sz="210"/>
             </a:lvl7pPr>
-            <a:lvl8pPr marL="755614" indent="0">
-              <a:buNone/>
-              <a:defRPr sz="236"/>
+            <a:lvl8pPr marL="672084" indent="0">
+              <a:buNone/>
+              <a:defRPr sz="210"/>
             </a:lvl8pPr>
-            <a:lvl9pPr marL="863559" indent="0">
-              <a:buNone/>
-              <a:defRPr sz="236"/>
+            <a:lvl9pPr marL="768096" indent="0">
+              <a:buNone/>
+              <a:defRPr sz="210"/>
             </a:lvl9pPr>
           </a:lstStyle>
           <a:p>
@@ -2098,7 +2534,7 @@
           <a:p>
             <a:fld id="{ED160DB6-C0DC-8946-AD05-C0754294CFDE}" type="datetimeFigureOut">
               <a:rPr lang="fr-FR" smtClean="0"/>
-              <a:t>17/07/2025</a:t>
+              <a:t>23/07/2025</a:t>
             </a:fld>
             <a:endParaRPr lang="fr-FR"/>
           </a:p>
@@ -2149,7 +2585,7 @@
     </p:spTree>
     <p:extLst>
       <p:ext uri="{BB962C8B-B14F-4D97-AF65-F5344CB8AC3E}">
-        <p14:creationId xmlns:p14="http://schemas.microsoft.com/office/powerpoint/2010/main" val="26880125"/>
+        <p14:creationId xmlns:p14="http://schemas.microsoft.com/office/powerpoint/2010/main" val="2814890642"/>
       </p:ext>
     </p:extLst>
   </p:cSld>
@@ -2188,15 +2624,15 @@
         </p:nvSpPr>
         <p:spPr>
           <a:xfrm>
-            <a:off x="210822" y="107950"/>
-            <a:ext cx="987155" cy="377825"/>
+            <a:off x="210822" y="95991"/>
+            <a:ext cx="987155" cy="335968"/>
           </a:xfrm>
         </p:spPr>
         <p:txBody>
           <a:bodyPr anchor="b"/>
           <a:lstStyle>
             <a:lvl1pPr>
-              <a:defRPr sz="756"/>
+              <a:defRPr sz="672"/>
             </a:lvl1pPr>
           </a:lstStyle>
           <a:p>
@@ -2220,8 +2656,8 @@
         </p:nvSpPr>
         <p:spPr>
           <a:xfrm>
-            <a:off x="1301196" y="233142"/>
-            <a:ext cx="1549479" cy="1150717"/>
+            <a:off x="1301196" y="207314"/>
+            <a:ext cx="1549479" cy="1023236"/>
           </a:xfrm>
         </p:spPr>
         <p:txBody>
@@ -2229,39 +2665,39 @@
           <a:lstStyle>
             <a:lvl1pPr marL="0" indent="0">
               <a:buNone/>
-              <a:defRPr sz="756"/>
+              <a:defRPr sz="672"/>
             </a:lvl1pPr>
-            <a:lvl2pPr marL="107945" indent="0">
-              <a:buNone/>
-              <a:defRPr sz="661"/>
+            <a:lvl2pPr marL="96012" indent="0">
+              <a:buNone/>
+              <a:defRPr sz="588"/>
             </a:lvl2pPr>
-            <a:lvl3pPr marL="215890" indent="0">
-              <a:buNone/>
-              <a:defRPr sz="567"/>
+            <a:lvl3pPr marL="192024" indent="0">
+              <a:buNone/>
+              <a:defRPr sz="504"/>
             </a:lvl3pPr>
-            <a:lvl4pPr marL="323835" indent="0">
-              <a:buNone/>
-              <a:defRPr sz="472"/>
+            <a:lvl4pPr marL="288036" indent="0">
+              <a:buNone/>
+              <a:defRPr sz="420"/>
             </a:lvl4pPr>
-            <a:lvl5pPr marL="431780" indent="0">
-              <a:buNone/>
-              <a:defRPr sz="472"/>
+            <a:lvl5pPr marL="384048" indent="0">
+              <a:buNone/>
+              <a:defRPr sz="420"/>
             </a:lvl5pPr>
-            <a:lvl6pPr marL="539725" indent="0">
-              <a:buNone/>
-              <a:defRPr sz="472"/>
+            <a:lvl6pPr marL="480060" indent="0">
+              <a:buNone/>
+              <a:defRPr sz="420"/>
             </a:lvl6pPr>
-            <a:lvl7pPr marL="647670" indent="0">
-              <a:buNone/>
-              <a:defRPr sz="472"/>
+            <a:lvl7pPr marL="576072" indent="0">
+              <a:buNone/>
+              <a:defRPr sz="420"/>
             </a:lvl7pPr>
-            <a:lvl8pPr marL="755614" indent="0">
-              <a:buNone/>
-              <a:defRPr sz="472"/>
+            <a:lvl8pPr marL="672084" indent="0">
+              <a:buNone/>
+              <a:defRPr sz="420"/>
             </a:lvl8pPr>
-            <a:lvl9pPr marL="863559" indent="0">
-              <a:buNone/>
-              <a:defRPr sz="472"/>
+            <a:lvl9pPr marL="768096" indent="0">
+              <a:buNone/>
+              <a:defRPr sz="420"/>
             </a:lvl9pPr>
           </a:lstStyle>
           <a:p>
@@ -2285,8 +2721,8 @@
         </p:nvSpPr>
         <p:spPr>
           <a:xfrm>
-            <a:off x="210822" y="485775"/>
-            <a:ext cx="987155" cy="899958"/>
+            <a:off x="210822" y="431959"/>
+            <a:ext cx="987155" cy="800257"/>
           </a:xfrm>
         </p:spPr>
         <p:txBody>
@@ -2294,39 +2730,39 @@
           <a:lstStyle>
             <a:lvl1pPr marL="0" indent="0">
               <a:buNone/>
-              <a:defRPr sz="378"/>
+              <a:defRPr sz="336"/>
             </a:lvl1pPr>
-            <a:lvl2pPr marL="107945" indent="0">
-              <a:buNone/>
-              <a:defRPr sz="331"/>
+            <a:lvl2pPr marL="96012" indent="0">
+              <a:buNone/>
+              <a:defRPr sz="294"/>
             </a:lvl2pPr>
-            <a:lvl3pPr marL="215890" indent="0">
-              <a:buNone/>
-              <a:defRPr sz="283"/>
+            <a:lvl3pPr marL="192024" indent="0">
+              <a:buNone/>
+              <a:defRPr sz="252"/>
             </a:lvl3pPr>
-            <a:lvl4pPr marL="323835" indent="0">
-              <a:buNone/>
-              <a:defRPr sz="236"/>
+            <a:lvl4pPr marL="288036" indent="0">
+              <a:buNone/>
+              <a:defRPr sz="210"/>
             </a:lvl4pPr>
-            <a:lvl5pPr marL="431780" indent="0">
-              <a:buNone/>
-              <a:defRPr sz="236"/>
+            <a:lvl5pPr marL="384048" indent="0">
+              <a:buNone/>
+              <a:defRPr sz="210"/>
             </a:lvl5pPr>
-            <a:lvl6pPr marL="539725" indent="0">
-              <a:buNone/>
-              <a:defRPr sz="236"/>
+            <a:lvl6pPr marL="480060" indent="0">
+              <a:buNone/>
+              <a:defRPr sz="210"/>
             </a:lvl6pPr>
-            <a:lvl7pPr marL="647670" indent="0">
-              <a:buNone/>
-              <a:defRPr sz="236"/>
+            <a:lvl7pPr marL="576072" indent="0">
+              <a:buNone/>
+              <a:defRPr sz="210"/>
             </a:lvl7pPr>
-            <a:lvl8pPr marL="755614" indent="0">
-              <a:buNone/>
-              <a:defRPr sz="236"/>
+            <a:lvl8pPr marL="672084" indent="0">
+              <a:buNone/>
+              <a:defRPr sz="210"/>
             </a:lvl8pPr>
-            <a:lvl9pPr marL="863559" indent="0">
-              <a:buNone/>
-              <a:defRPr sz="236"/>
+            <a:lvl9pPr marL="768096" indent="0">
+              <a:buNone/>
+              <a:defRPr sz="210"/>
             </a:lvl9pPr>
           </a:lstStyle>
           <a:p>
@@ -2355,7 +2791,7 @@
           <a:p>
             <a:fld id="{ED160DB6-C0DC-8946-AD05-C0754294CFDE}" type="datetimeFigureOut">
               <a:rPr lang="fr-FR" smtClean="0"/>
-              <a:t>17/07/2025</a:t>
+              <a:t>23/07/2025</a:t>
             </a:fld>
             <a:endParaRPr lang="fr-FR"/>
           </a:p>
@@ -2406,7 +2842,7 @@
     </p:spTree>
     <p:extLst>
       <p:ext uri="{BB962C8B-B14F-4D97-AF65-F5344CB8AC3E}">
-        <p14:creationId xmlns:p14="http://schemas.microsoft.com/office/powerpoint/2010/main" val="3017208800"/>
+        <p14:creationId xmlns:p14="http://schemas.microsoft.com/office/powerpoint/2010/main" val="475760558"/>
       </p:ext>
     </p:extLst>
   </p:cSld>
@@ -2450,8 +2886,8 @@
         </p:nvSpPr>
         <p:spPr>
           <a:xfrm>
-            <a:off x="210423" y="86210"/>
-            <a:ext cx="2639854" cy="312980"/>
+            <a:off x="210423" y="76659"/>
+            <a:ext cx="2639854" cy="278307"/>
           </a:xfrm>
           <a:prstGeom prst="rect">
             <a:avLst/>
@@ -2483,8 +2919,8 @@
         </p:nvSpPr>
         <p:spPr>
           <a:xfrm>
-            <a:off x="210423" y="431050"/>
-            <a:ext cx="2639854" cy="1027399"/>
+            <a:off x="210423" y="383297"/>
+            <a:ext cx="2639854" cy="913580"/>
           </a:xfrm>
           <a:prstGeom prst="rect">
             <a:avLst/>
@@ -2545,8 +2981,8 @@
         </p:nvSpPr>
         <p:spPr>
           <a:xfrm>
-            <a:off x="210423" y="1500805"/>
-            <a:ext cx="688658" cy="86210"/>
+            <a:off x="210423" y="1334540"/>
+            <a:ext cx="688658" cy="76659"/>
           </a:xfrm>
           <a:prstGeom prst="rect">
             <a:avLst/>
@@ -2556,7 +2992,7 @@
           <a:bodyPr vert="horz" lIns="91440" tIns="45720" rIns="91440" bIns="45720" rtlCol="0" anchor="ctr"/>
           <a:lstStyle>
             <a:lvl1pPr algn="l">
-              <a:defRPr sz="283">
+              <a:defRPr sz="252">
                 <a:solidFill>
                   <a:schemeClr val="tx1">
                     <a:tint val="75000"/>
@@ -2568,7 +3004,7 @@
           <a:p>
             <a:fld id="{ED160DB6-C0DC-8946-AD05-C0754294CFDE}" type="datetimeFigureOut">
               <a:rPr lang="fr-FR" smtClean="0"/>
-              <a:t>17/07/2025</a:t>
+              <a:t>23/07/2025</a:t>
             </a:fld>
             <a:endParaRPr lang="fr-FR"/>
           </a:p>
@@ -2586,8 +3022,8 @@
         </p:nvSpPr>
         <p:spPr>
           <a:xfrm>
-            <a:off x="1013857" y="1500805"/>
-            <a:ext cx="1032986" cy="86210"/>
+            <a:off x="1013857" y="1334540"/>
+            <a:ext cx="1032986" cy="76659"/>
           </a:xfrm>
           <a:prstGeom prst="rect">
             <a:avLst/>
@@ -2597,7 +3033,7 @@
           <a:bodyPr vert="horz" lIns="91440" tIns="45720" rIns="91440" bIns="45720" rtlCol="0" anchor="ctr"/>
           <a:lstStyle>
             <a:lvl1pPr algn="ctr">
-              <a:defRPr sz="283">
+              <a:defRPr sz="252">
                 <a:solidFill>
                   <a:schemeClr val="tx1">
                     <a:tint val="75000"/>
@@ -2623,8 +3059,8 @@
         </p:nvSpPr>
         <p:spPr>
           <a:xfrm>
-            <a:off x="2161619" y="1500805"/>
-            <a:ext cx="688658" cy="86210"/>
+            <a:off x="2161619" y="1334540"/>
+            <a:ext cx="688658" cy="76659"/>
           </a:xfrm>
           <a:prstGeom prst="rect">
             <a:avLst/>
@@ -2634,7 +3070,7 @@
           <a:bodyPr vert="horz" lIns="91440" tIns="45720" rIns="91440" bIns="45720" rtlCol="0" anchor="ctr"/>
           <a:lstStyle>
             <a:lvl1pPr algn="r">
-              <a:defRPr sz="283">
+              <a:defRPr sz="252">
                 <a:solidFill>
                   <a:schemeClr val="tx1">
                     <a:tint val="75000"/>
@@ -2655,27 +3091,27 @@
     </p:spTree>
     <p:extLst>
       <p:ext uri="{BB962C8B-B14F-4D97-AF65-F5344CB8AC3E}">
-        <p14:creationId xmlns:p14="http://schemas.microsoft.com/office/powerpoint/2010/main" val="1520783126"/>
+        <p14:creationId xmlns:p14="http://schemas.microsoft.com/office/powerpoint/2010/main" val="2443900239"/>
       </p:ext>
     </p:extLst>
   </p:cSld>
   <p:clrMap bg1="lt1" tx1="dk1" bg2="lt2" tx2="dk2" accent1="accent1" accent2="accent2" accent3="accent3" accent4="accent4" accent5="accent5" accent6="accent6" hlink="hlink" folHlink="folHlink"/>
   <p:sldLayoutIdLst>
-    <p:sldLayoutId id="2147483745" r:id="rId1"/>
-    <p:sldLayoutId id="2147483746" r:id="rId2"/>
-    <p:sldLayoutId id="2147483747" r:id="rId3"/>
-    <p:sldLayoutId id="2147483748" r:id="rId4"/>
-    <p:sldLayoutId id="2147483749" r:id="rId5"/>
-    <p:sldLayoutId id="2147483750" r:id="rId6"/>
-    <p:sldLayoutId id="2147483751" r:id="rId7"/>
-    <p:sldLayoutId id="2147483752" r:id="rId8"/>
-    <p:sldLayoutId id="2147483753" r:id="rId9"/>
-    <p:sldLayoutId id="2147483754" r:id="rId10"/>
-    <p:sldLayoutId id="2147483755" r:id="rId11"/>
+    <p:sldLayoutId id="2147483757" r:id="rId1"/>
+    <p:sldLayoutId id="2147483758" r:id="rId2"/>
+    <p:sldLayoutId id="2147483759" r:id="rId3"/>
+    <p:sldLayoutId id="2147483760" r:id="rId4"/>
+    <p:sldLayoutId id="2147483761" r:id="rId5"/>
+    <p:sldLayoutId id="2147483762" r:id="rId6"/>
+    <p:sldLayoutId id="2147483763" r:id="rId7"/>
+    <p:sldLayoutId id="2147483764" r:id="rId8"/>
+    <p:sldLayoutId id="2147483765" r:id="rId9"/>
+    <p:sldLayoutId id="2147483766" r:id="rId10"/>
+    <p:sldLayoutId id="2147483767" r:id="rId11"/>
   </p:sldLayoutIdLst>
   <p:txStyles>
     <p:titleStyle>
-      <a:lvl1pPr algn="l" defTabSz="215890" rtl="0" eaLnBrk="1" latinLnBrk="0" hangingPunct="1">
+      <a:lvl1pPr algn="l" defTabSz="192024" rtl="0" eaLnBrk="1" latinLnBrk="0" hangingPunct="1">
         <a:lnSpc>
           <a:spcPct val="90000"/>
         </a:lnSpc>
@@ -2683,7 +3119,7 @@
           <a:spcPct val="0"/>
         </a:spcBef>
         <a:buNone/>
-        <a:defRPr sz="1039" kern="1200">
+        <a:defRPr sz="924" kern="1200">
           <a:solidFill>
             <a:schemeClr val="tx1"/>
           </a:solidFill>
@@ -2694,16 +3130,16 @@
       </a:lvl1pPr>
     </p:titleStyle>
     <p:bodyStyle>
-      <a:lvl1pPr marL="53972" indent="-53972" algn="l" defTabSz="215890" rtl="0" eaLnBrk="1" latinLnBrk="0" hangingPunct="1">
+      <a:lvl1pPr marL="48006" indent="-48006" algn="l" defTabSz="192024" rtl="0" eaLnBrk="1" latinLnBrk="0" hangingPunct="1">
         <a:lnSpc>
           <a:spcPct val="90000"/>
         </a:lnSpc>
         <a:spcBef>
-          <a:spcPts val="236"/>
+          <a:spcPts val="210"/>
         </a:spcBef>
         <a:buFont typeface="Arial" panose="020B0604020202020204" pitchFamily="34" charset="0"/>
         <a:buChar char="•"/>
-        <a:defRPr sz="661" kern="1200">
+        <a:defRPr sz="588" kern="1200">
           <a:solidFill>
             <a:schemeClr val="tx1"/>
           </a:solidFill>
@@ -2712,16 +3148,16 @@
           <a:cs typeface="+mn-cs"/>
         </a:defRPr>
       </a:lvl1pPr>
-      <a:lvl2pPr marL="161917" indent="-53972" algn="l" defTabSz="215890" rtl="0" eaLnBrk="1" latinLnBrk="0" hangingPunct="1">
+      <a:lvl2pPr marL="144018" indent="-48006" algn="l" defTabSz="192024" rtl="0" eaLnBrk="1" latinLnBrk="0" hangingPunct="1">
         <a:lnSpc>
           <a:spcPct val="90000"/>
         </a:lnSpc>
         <a:spcBef>
-          <a:spcPts val="118"/>
+          <a:spcPts val="105"/>
         </a:spcBef>
         <a:buFont typeface="Arial" panose="020B0604020202020204" pitchFamily="34" charset="0"/>
         <a:buChar char="•"/>
-        <a:defRPr sz="567" kern="1200">
+        <a:defRPr sz="504" kern="1200">
           <a:solidFill>
             <a:schemeClr val="tx1"/>
           </a:solidFill>
@@ -2730,16 +3166,16 @@
           <a:cs typeface="+mn-cs"/>
         </a:defRPr>
       </a:lvl2pPr>
-      <a:lvl3pPr marL="269862" indent="-53972" algn="l" defTabSz="215890" rtl="0" eaLnBrk="1" latinLnBrk="0" hangingPunct="1">
+      <a:lvl3pPr marL="240030" indent="-48006" algn="l" defTabSz="192024" rtl="0" eaLnBrk="1" latinLnBrk="0" hangingPunct="1">
         <a:lnSpc>
           <a:spcPct val="90000"/>
         </a:lnSpc>
         <a:spcBef>
-          <a:spcPts val="118"/>
+          <a:spcPts val="105"/>
         </a:spcBef>
         <a:buFont typeface="Arial" panose="020B0604020202020204" pitchFamily="34" charset="0"/>
         <a:buChar char="•"/>
-        <a:defRPr sz="472" kern="1200">
+        <a:defRPr sz="420" kern="1200">
           <a:solidFill>
             <a:schemeClr val="tx1"/>
           </a:solidFill>
@@ -2748,16 +3184,16 @@
           <a:cs typeface="+mn-cs"/>
         </a:defRPr>
       </a:lvl3pPr>
-      <a:lvl4pPr marL="377807" indent="-53972" algn="l" defTabSz="215890" rtl="0" eaLnBrk="1" latinLnBrk="0" hangingPunct="1">
+      <a:lvl4pPr marL="336042" indent="-48006" algn="l" defTabSz="192024" rtl="0" eaLnBrk="1" latinLnBrk="0" hangingPunct="1">
         <a:lnSpc>
           <a:spcPct val="90000"/>
         </a:lnSpc>
         <a:spcBef>
-          <a:spcPts val="118"/>
+          <a:spcPts val="105"/>
         </a:spcBef>
         <a:buFont typeface="Arial" panose="020B0604020202020204" pitchFamily="34" charset="0"/>
         <a:buChar char="•"/>
-        <a:defRPr sz="425" kern="1200">
+        <a:defRPr sz="378" kern="1200">
           <a:solidFill>
             <a:schemeClr val="tx1"/>
           </a:solidFill>
@@ -2766,16 +3202,16 @@
           <a:cs typeface="+mn-cs"/>
         </a:defRPr>
       </a:lvl4pPr>
-      <a:lvl5pPr marL="485752" indent="-53972" algn="l" defTabSz="215890" rtl="0" eaLnBrk="1" latinLnBrk="0" hangingPunct="1">
+      <a:lvl5pPr marL="432054" indent="-48006" algn="l" defTabSz="192024" rtl="0" eaLnBrk="1" latinLnBrk="0" hangingPunct="1">
         <a:lnSpc>
           <a:spcPct val="90000"/>
         </a:lnSpc>
         <a:spcBef>
-          <a:spcPts val="118"/>
+          <a:spcPts val="105"/>
         </a:spcBef>
         <a:buFont typeface="Arial" panose="020B0604020202020204" pitchFamily="34" charset="0"/>
         <a:buChar char="•"/>
-        <a:defRPr sz="425" kern="1200">
+        <a:defRPr sz="378" kern="1200">
           <a:solidFill>
             <a:schemeClr val="tx1"/>
           </a:solidFill>
@@ -2784,16 +3220,16 @@
           <a:cs typeface="+mn-cs"/>
         </a:defRPr>
       </a:lvl5pPr>
-      <a:lvl6pPr marL="593697" indent="-53972" algn="l" defTabSz="215890" rtl="0" eaLnBrk="1" latinLnBrk="0" hangingPunct="1">
+      <a:lvl6pPr marL="528066" indent="-48006" algn="l" defTabSz="192024" rtl="0" eaLnBrk="1" latinLnBrk="0" hangingPunct="1">
         <a:lnSpc>
           <a:spcPct val="90000"/>
         </a:lnSpc>
         <a:spcBef>
-          <a:spcPts val="118"/>
+          <a:spcPts val="105"/>
         </a:spcBef>
         <a:buFont typeface="Arial" panose="020B0604020202020204" pitchFamily="34" charset="0"/>
         <a:buChar char="•"/>
-        <a:defRPr sz="425" kern="1200">
+        <a:defRPr sz="378" kern="1200">
           <a:solidFill>
             <a:schemeClr val="tx1"/>
           </a:solidFill>
@@ -2802,16 +3238,16 @@
           <a:cs typeface="+mn-cs"/>
         </a:defRPr>
       </a:lvl6pPr>
-      <a:lvl7pPr marL="701642" indent="-53972" algn="l" defTabSz="215890" rtl="0" eaLnBrk="1" latinLnBrk="0" hangingPunct="1">
+      <a:lvl7pPr marL="624078" indent="-48006" algn="l" defTabSz="192024" rtl="0" eaLnBrk="1" latinLnBrk="0" hangingPunct="1">
         <a:lnSpc>
           <a:spcPct val="90000"/>
         </a:lnSpc>
         <a:spcBef>
-          <a:spcPts val="118"/>
+          <a:spcPts val="105"/>
         </a:spcBef>
         <a:buFont typeface="Arial" panose="020B0604020202020204" pitchFamily="34" charset="0"/>
         <a:buChar char="•"/>
-        <a:defRPr sz="425" kern="1200">
+        <a:defRPr sz="378" kern="1200">
           <a:solidFill>
             <a:schemeClr val="tx1"/>
           </a:solidFill>
@@ -2820,16 +3256,16 @@
           <a:cs typeface="+mn-cs"/>
         </a:defRPr>
       </a:lvl7pPr>
-      <a:lvl8pPr marL="809587" indent="-53972" algn="l" defTabSz="215890" rtl="0" eaLnBrk="1" latinLnBrk="0" hangingPunct="1">
+      <a:lvl8pPr marL="720090" indent="-48006" algn="l" defTabSz="192024" rtl="0" eaLnBrk="1" latinLnBrk="0" hangingPunct="1">
         <a:lnSpc>
           <a:spcPct val="90000"/>
         </a:lnSpc>
         <a:spcBef>
-          <a:spcPts val="118"/>
+          <a:spcPts val="105"/>
         </a:spcBef>
         <a:buFont typeface="Arial" panose="020B0604020202020204" pitchFamily="34" charset="0"/>
         <a:buChar char="•"/>
-        <a:defRPr sz="425" kern="1200">
+        <a:defRPr sz="378" kern="1200">
           <a:solidFill>
             <a:schemeClr val="tx1"/>
           </a:solidFill>
@@ -2838,16 +3274,16 @@
           <a:cs typeface="+mn-cs"/>
         </a:defRPr>
       </a:lvl8pPr>
-      <a:lvl9pPr marL="917532" indent="-53972" algn="l" defTabSz="215890" rtl="0" eaLnBrk="1" latinLnBrk="0" hangingPunct="1">
+      <a:lvl9pPr marL="816102" indent="-48006" algn="l" defTabSz="192024" rtl="0" eaLnBrk="1" latinLnBrk="0" hangingPunct="1">
         <a:lnSpc>
           <a:spcPct val="90000"/>
         </a:lnSpc>
         <a:spcBef>
-          <a:spcPts val="118"/>
+          <a:spcPts val="105"/>
         </a:spcBef>
         <a:buFont typeface="Arial" panose="020B0604020202020204" pitchFamily="34" charset="0"/>
         <a:buChar char="•"/>
-        <a:defRPr sz="425" kern="1200">
+        <a:defRPr sz="378" kern="1200">
           <a:solidFill>
             <a:schemeClr val="tx1"/>
           </a:solidFill>
@@ -2861,8 +3297,8 @@
       <a:defPPr>
         <a:defRPr lang="en-US"/>
       </a:defPPr>
-      <a:lvl1pPr marL="0" algn="l" defTabSz="215890" rtl="0" eaLnBrk="1" latinLnBrk="0" hangingPunct="1">
-        <a:defRPr sz="425" kern="1200">
+      <a:lvl1pPr marL="0" algn="l" defTabSz="192024" rtl="0" eaLnBrk="1" latinLnBrk="0" hangingPunct="1">
+        <a:defRPr sz="378" kern="1200">
           <a:solidFill>
             <a:schemeClr val="tx1"/>
           </a:solidFill>
@@ -2871,8 +3307,8 @@
           <a:cs typeface="+mn-cs"/>
         </a:defRPr>
       </a:lvl1pPr>
-      <a:lvl2pPr marL="107945" algn="l" defTabSz="215890" rtl="0" eaLnBrk="1" latinLnBrk="0" hangingPunct="1">
-        <a:defRPr sz="425" kern="1200">
+      <a:lvl2pPr marL="96012" algn="l" defTabSz="192024" rtl="0" eaLnBrk="1" latinLnBrk="0" hangingPunct="1">
+        <a:defRPr sz="378" kern="1200">
           <a:solidFill>
             <a:schemeClr val="tx1"/>
           </a:solidFill>
@@ -2881,8 +3317,8 @@
           <a:cs typeface="+mn-cs"/>
         </a:defRPr>
       </a:lvl2pPr>
-      <a:lvl3pPr marL="215890" algn="l" defTabSz="215890" rtl="0" eaLnBrk="1" latinLnBrk="0" hangingPunct="1">
-        <a:defRPr sz="425" kern="1200">
+      <a:lvl3pPr marL="192024" algn="l" defTabSz="192024" rtl="0" eaLnBrk="1" latinLnBrk="0" hangingPunct="1">
+        <a:defRPr sz="378" kern="1200">
           <a:solidFill>
             <a:schemeClr val="tx1"/>
           </a:solidFill>
@@ -2891,8 +3327,8 @@
           <a:cs typeface="+mn-cs"/>
         </a:defRPr>
       </a:lvl3pPr>
-      <a:lvl4pPr marL="323835" algn="l" defTabSz="215890" rtl="0" eaLnBrk="1" latinLnBrk="0" hangingPunct="1">
-        <a:defRPr sz="425" kern="1200">
+      <a:lvl4pPr marL="288036" algn="l" defTabSz="192024" rtl="0" eaLnBrk="1" latinLnBrk="0" hangingPunct="1">
+        <a:defRPr sz="378" kern="1200">
           <a:solidFill>
             <a:schemeClr val="tx1"/>
           </a:solidFill>
@@ -2901,8 +3337,8 @@
           <a:cs typeface="+mn-cs"/>
         </a:defRPr>
       </a:lvl4pPr>
-      <a:lvl5pPr marL="431780" algn="l" defTabSz="215890" rtl="0" eaLnBrk="1" latinLnBrk="0" hangingPunct="1">
-        <a:defRPr sz="425" kern="1200">
+      <a:lvl5pPr marL="384048" algn="l" defTabSz="192024" rtl="0" eaLnBrk="1" latinLnBrk="0" hangingPunct="1">
+        <a:defRPr sz="378" kern="1200">
           <a:solidFill>
             <a:schemeClr val="tx1"/>
           </a:solidFill>
@@ -2911,8 +3347,8 @@
           <a:cs typeface="+mn-cs"/>
         </a:defRPr>
       </a:lvl5pPr>
-      <a:lvl6pPr marL="539725" algn="l" defTabSz="215890" rtl="0" eaLnBrk="1" latinLnBrk="0" hangingPunct="1">
-        <a:defRPr sz="425" kern="1200">
+      <a:lvl6pPr marL="480060" algn="l" defTabSz="192024" rtl="0" eaLnBrk="1" latinLnBrk="0" hangingPunct="1">
+        <a:defRPr sz="378" kern="1200">
           <a:solidFill>
             <a:schemeClr val="tx1"/>
           </a:solidFill>
@@ -2921,8 +3357,8 @@
           <a:cs typeface="+mn-cs"/>
         </a:defRPr>
       </a:lvl6pPr>
-      <a:lvl7pPr marL="647670" algn="l" defTabSz="215890" rtl="0" eaLnBrk="1" latinLnBrk="0" hangingPunct="1">
-        <a:defRPr sz="425" kern="1200">
+      <a:lvl7pPr marL="576072" algn="l" defTabSz="192024" rtl="0" eaLnBrk="1" latinLnBrk="0" hangingPunct="1">
+        <a:defRPr sz="378" kern="1200">
           <a:solidFill>
             <a:schemeClr val="tx1"/>
           </a:solidFill>
@@ -2931,8 +3367,8 @@
           <a:cs typeface="+mn-cs"/>
         </a:defRPr>
       </a:lvl7pPr>
-      <a:lvl8pPr marL="755614" algn="l" defTabSz="215890" rtl="0" eaLnBrk="1" latinLnBrk="0" hangingPunct="1">
-        <a:defRPr sz="425" kern="1200">
+      <a:lvl8pPr marL="672084" algn="l" defTabSz="192024" rtl="0" eaLnBrk="1" latinLnBrk="0" hangingPunct="1">
+        <a:defRPr sz="378" kern="1200">
           <a:solidFill>
             <a:schemeClr val="tx1"/>
           </a:solidFill>
@@ -2941,8 +3377,8 @@
           <a:cs typeface="+mn-cs"/>
         </a:defRPr>
       </a:lvl8pPr>
-      <a:lvl9pPr marL="863559" algn="l" defTabSz="215890" rtl="0" eaLnBrk="1" latinLnBrk="0" hangingPunct="1">
-        <a:defRPr sz="425" kern="1200">
+      <a:lvl9pPr marL="768096" algn="l" defTabSz="192024" rtl="0" eaLnBrk="1" latinLnBrk="0" hangingPunct="1">
+        <a:defRPr sz="378" kern="1200">
           <a:solidFill>
             <a:schemeClr val="tx1"/>
           </a:solidFill>
@@ -2973,148 +3409,12 @@
           <a:chExt cx="0" cy="0"/>
         </a:xfrm>
       </p:grpSpPr>
-      <p:sp>
-        <p:nvSpPr>
-          <p:cNvPr id="20" name="ZoneTexte 19">
+      <p:pic>
+        <p:nvPicPr>
+          <p:cNvPr id="3" name="Image 2">
             <a:extLst>
               <a:ext uri="{FF2B5EF4-FFF2-40B4-BE49-F238E27FC236}">
-                <a16:creationId xmlns:a16="http://schemas.microsoft.com/office/drawing/2014/main" id="{72E01FBA-D518-D770-65C9-CA3D02D9B0E7}"/>
-              </a:ext>
-            </a:extLst>
-          </p:cNvPr>
-          <p:cNvSpPr txBox="1"/>
-          <p:nvPr/>
-        </p:nvSpPr>
-        <p:spPr>
-          <a:xfrm>
-            <a:off x="-77664" y="192"/>
-            <a:ext cx="290464" cy="200055"/>
-          </a:xfrm>
-          <a:prstGeom prst="rect">
-            <a:avLst/>
-          </a:prstGeom>
-          <a:noFill/>
-        </p:spPr>
-        <p:txBody>
-          <a:bodyPr wrap="none" rtlCol="0">
-            <a:spAutoFit/>
-          </a:bodyPr>
-          <a:lstStyle/>
-          <a:p>
-            <a:r>
-              <a:rPr lang="fr-FR" sz="700" dirty="0"/>
-              <a:t>(A)</a:t>
-            </a:r>
-          </a:p>
-        </p:txBody>
-      </p:sp>
-      <p:sp>
-        <p:nvSpPr>
-          <p:cNvPr id="21" name="ZoneTexte 20">
-            <a:extLst>
-              <a:ext uri="{FF2B5EF4-FFF2-40B4-BE49-F238E27FC236}">
-                <a16:creationId xmlns:a16="http://schemas.microsoft.com/office/drawing/2014/main" id="{E9497EF0-316A-9BAC-0EAA-1C79FD33B1B2}"/>
-              </a:ext>
-            </a:extLst>
-          </p:cNvPr>
-          <p:cNvSpPr txBox="1"/>
-          <p:nvPr/>
-        </p:nvSpPr>
-        <p:spPr>
-          <a:xfrm>
-            <a:off x="1036532" y="191"/>
-            <a:ext cx="287258" cy="200055"/>
-          </a:xfrm>
-          <a:prstGeom prst="rect">
-            <a:avLst/>
-          </a:prstGeom>
-          <a:noFill/>
-        </p:spPr>
-        <p:txBody>
-          <a:bodyPr wrap="none" rtlCol="0">
-            <a:spAutoFit/>
-          </a:bodyPr>
-          <a:lstStyle/>
-          <a:p>
-            <a:r>
-              <a:rPr lang="fr-FR" sz="700" dirty="0"/>
-              <a:t>(B)</a:t>
-            </a:r>
-          </a:p>
-        </p:txBody>
-      </p:sp>
-      <p:sp>
-        <p:nvSpPr>
-          <p:cNvPr id="24" name="ZoneTexte 23">
-            <a:extLst>
-              <a:ext uri="{FF2B5EF4-FFF2-40B4-BE49-F238E27FC236}">
-                <a16:creationId xmlns:a16="http://schemas.microsoft.com/office/drawing/2014/main" id="{F0556C2E-EB1B-9628-4126-6B04AB317219}"/>
-              </a:ext>
-            </a:extLst>
-          </p:cNvPr>
-          <p:cNvSpPr txBox="1"/>
-          <p:nvPr/>
-        </p:nvSpPr>
-        <p:spPr>
-          <a:xfrm>
-            <a:off x="1802125" y="190"/>
-            <a:ext cx="287258" cy="200055"/>
-          </a:xfrm>
-          <a:prstGeom prst="rect">
-            <a:avLst/>
-          </a:prstGeom>
-          <a:noFill/>
-        </p:spPr>
-        <p:txBody>
-          <a:bodyPr wrap="none" rtlCol="0">
-            <a:spAutoFit/>
-          </a:bodyPr>
-          <a:lstStyle/>
-          <a:p>
-            <a:r>
-              <a:rPr lang="fr-FR" sz="700" dirty="0"/>
-              <a:t>(C)</a:t>
-            </a:r>
-          </a:p>
-        </p:txBody>
-      </p:sp>
-      <p:pic>
-        <p:nvPicPr>
-          <p:cNvPr id="6" name="Image 5">
-            <a:extLst>
-              <a:ext uri="{FF2B5EF4-FFF2-40B4-BE49-F238E27FC236}">
-                <a16:creationId xmlns:a16="http://schemas.microsoft.com/office/drawing/2014/main" id="{4EBABF41-E035-B9F6-3374-27374DEC57BD}"/>
-              </a:ext>
-            </a:extLst>
-          </p:cNvPr>
-          <p:cNvPicPr>
-            <a:picLocks noChangeAspect="1"/>
-          </p:cNvPicPr>
-          <p:nvPr/>
-        </p:nvPicPr>
-        <p:blipFill>
-          <a:blip r:embed="rId2"/>
-          <a:srcRect l="21918" t="40190" r="19065" b="44541"/>
-          <a:stretch>
-            <a:fillRect/>
-          </a:stretch>
-        </p:blipFill>
-        <p:spPr>
-          <a:xfrm>
-            <a:off x="358048" y="1330874"/>
-            <a:ext cx="1460601" cy="200055"/>
-          </a:xfrm>
-          <a:prstGeom prst="rect">
-            <a:avLst/>
-          </a:prstGeom>
-        </p:spPr>
-      </p:pic>
-      <p:pic>
-        <p:nvPicPr>
-          <p:cNvPr id="8" name="Image 7">
-            <a:extLst>
-              <a:ext uri="{FF2B5EF4-FFF2-40B4-BE49-F238E27FC236}">
-                <a16:creationId xmlns:a16="http://schemas.microsoft.com/office/drawing/2014/main" id="{704B9E24-195F-0E29-597B-3FE6E1E1BEEF}"/>
+                <a16:creationId xmlns:a16="http://schemas.microsoft.com/office/drawing/2014/main" id="{CF1B1591-E070-6BAF-310E-C28BF8DD5F2A}"/>
               </a:ext>
             </a:extLst>
           </p:cNvPr>
@@ -3131,8 +3431,144 @@
         </p:blipFill>
         <p:spPr>
           <a:xfrm>
-            <a:off x="0" y="43654"/>
-            <a:ext cx="3114924" cy="1465846"/>
+            <a:off x="0" y="5556"/>
+            <a:ext cx="3130550" cy="1473200"/>
+          </a:xfrm>
+          <a:prstGeom prst="rect">
+            <a:avLst/>
+          </a:prstGeom>
+        </p:spPr>
+      </p:pic>
+      <p:sp>
+        <p:nvSpPr>
+          <p:cNvPr id="20" name="ZoneTexte 19">
+            <a:extLst>
+              <a:ext uri="{FF2B5EF4-FFF2-40B4-BE49-F238E27FC236}">
+                <a16:creationId xmlns:a16="http://schemas.microsoft.com/office/drawing/2014/main" id="{72E01FBA-D518-D770-65C9-CA3D02D9B0E7}"/>
+              </a:ext>
+            </a:extLst>
+          </p:cNvPr>
+          <p:cNvSpPr txBox="1"/>
+          <p:nvPr/>
+        </p:nvSpPr>
+        <p:spPr>
+          <a:xfrm>
+            <a:off x="-77664" y="-23211"/>
+            <a:ext cx="290464" cy="200055"/>
+          </a:xfrm>
+          <a:prstGeom prst="rect">
+            <a:avLst/>
+          </a:prstGeom>
+          <a:noFill/>
+        </p:spPr>
+        <p:txBody>
+          <a:bodyPr wrap="none" rtlCol="0">
+            <a:spAutoFit/>
+          </a:bodyPr>
+          <a:lstStyle/>
+          <a:p>
+            <a:r>
+              <a:rPr lang="fr-FR" sz="700" dirty="0"/>
+              <a:t>(A)</a:t>
+            </a:r>
+          </a:p>
+        </p:txBody>
+      </p:sp>
+      <p:sp>
+        <p:nvSpPr>
+          <p:cNvPr id="21" name="ZoneTexte 20">
+            <a:extLst>
+              <a:ext uri="{FF2B5EF4-FFF2-40B4-BE49-F238E27FC236}">
+                <a16:creationId xmlns:a16="http://schemas.microsoft.com/office/drawing/2014/main" id="{E9497EF0-316A-9BAC-0EAA-1C79FD33B1B2}"/>
+              </a:ext>
+            </a:extLst>
+          </p:cNvPr>
+          <p:cNvSpPr txBox="1"/>
+          <p:nvPr/>
+        </p:nvSpPr>
+        <p:spPr>
+          <a:xfrm>
+            <a:off x="1036532" y="-23212"/>
+            <a:ext cx="287258" cy="200055"/>
+          </a:xfrm>
+          <a:prstGeom prst="rect">
+            <a:avLst/>
+          </a:prstGeom>
+          <a:noFill/>
+        </p:spPr>
+        <p:txBody>
+          <a:bodyPr wrap="none" rtlCol="0">
+            <a:spAutoFit/>
+          </a:bodyPr>
+          <a:lstStyle/>
+          <a:p>
+            <a:r>
+              <a:rPr lang="fr-FR" sz="700" dirty="0"/>
+              <a:t>(B)</a:t>
+            </a:r>
+          </a:p>
+        </p:txBody>
+      </p:sp>
+      <p:sp>
+        <p:nvSpPr>
+          <p:cNvPr id="24" name="ZoneTexte 23">
+            <a:extLst>
+              <a:ext uri="{FF2B5EF4-FFF2-40B4-BE49-F238E27FC236}">
+                <a16:creationId xmlns:a16="http://schemas.microsoft.com/office/drawing/2014/main" id="{F0556C2E-EB1B-9628-4126-6B04AB317219}"/>
+              </a:ext>
+            </a:extLst>
+          </p:cNvPr>
+          <p:cNvSpPr txBox="1"/>
+          <p:nvPr/>
+        </p:nvSpPr>
+        <p:spPr>
+          <a:xfrm>
+            <a:off x="1802125" y="-23213"/>
+            <a:ext cx="287258" cy="200055"/>
+          </a:xfrm>
+          <a:prstGeom prst="rect">
+            <a:avLst/>
+          </a:prstGeom>
+          <a:noFill/>
+        </p:spPr>
+        <p:txBody>
+          <a:bodyPr wrap="none" rtlCol="0">
+            <a:spAutoFit/>
+          </a:bodyPr>
+          <a:lstStyle/>
+          <a:p>
+            <a:r>
+              <a:rPr lang="fr-FR" sz="700" dirty="0"/>
+              <a:t>(C)</a:t>
+            </a:r>
+          </a:p>
+        </p:txBody>
+      </p:sp>
+      <p:pic>
+        <p:nvPicPr>
+          <p:cNvPr id="6" name="Image 5">
+            <a:extLst>
+              <a:ext uri="{FF2B5EF4-FFF2-40B4-BE49-F238E27FC236}">
+                <a16:creationId xmlns:a16="http://schemas.microsoft.com/office/drawing/2014/main" id="{4EBABF41-E035-B9F6-3374-27374DEC57BD}"/>
+              </a:ext>
+            </a:extLst>
+          </p:cNvPr>
+          <p:cNvPicPr>
+            <a:picLocks noChangeAspect="1"/>
+          </p:cNvPicPr>
+          <p:nvPr/>
+        </p:nvPicPr>
+        <p:blipFill>
+          <a:blip r:embed="rId4"/>
+          <a:srcRect l="21918" t="40190" r="19065" b="44541"/>
+          <a:stretch>
+            <a:fillRect/>
+          </a:stretch>
+        </p:blipFill>
+        <p:spPr>
+          <a:xfrm>
+            <a:off x="383706" y="1255475"/>
+            <a:ext cx="1305651" cy="178832"/>
           </a:xfrm>
           <a:prstGeom prst="rect">
             <a:avLst/>
@@ -3411,4 +3847,299 @@
     </a:ext>
   </a:extLst>
 </a:theme>
+</file>
+
+<file path=ppt/theme/theme2.xml><?xml version="1.0" encoding="utf-8"?>
+<a:theme xmlns:a="http://schemas.openxmlformats.org/drawingml/2006/main" name="Thème Office">
+  <a:themeElements>
+    <a:clrScheme name="Office">
+      <a:dk1>
+        <a:sysClr val="windowText" lastClr="000000"/>
+      </a:dk1>
+      <a:lt1>
+        <a:sysClr val="window" lastClr="FFFFFF"/>
+      </a:lt1>
+      <a:dk2>
+        <a:srgbClr val="44546A"/>
+      </a:dk2>
+      <a:lt2>
+        <a:srgbClr val="E7E6E6"/>
+      </a:lt2>
+      <a:accent1>
+        <a:srgbClr val="4472C4"/>
+      </a:accent1>
+      <a:accent2>
+        <a:srgbClr val="ED7D31"/>
+      </a:accent2>
+      <a:accent3>
+        <a:srgbClr val="A5A5A5"/>
+      </a:accent3>
+      <a:accent4>
+        <a:srgbClr val="FFC000"/>
+      </a:accent4>
+      <a:accent5>
+        <a:srgbClr val="5B9BD5"/>
+      </a:accent5>
+      <a:accent6>
+        <a:srgbClr val="70AD47"/>
+      </a:accent6>
+      <a:hlink>
+        <a:srgbClr val="0563C1"/>
+      </a:hlink>
+      <a:folHlink>
+        <a:srgbClr val="954F72"/>
+      </a:folHlink>
+    </a:clrScheme>
+    <a:fontScheme name="Office">
+      <a:majorFont>
+        <a:latin typeface="Calibri Light" panose="020F0302020204030204"/>
+        <a:ea typeface=""/>
+        <a:cs typeface=""/>
+        <a:font script="Jpan" typeface="游ゴシック Light"/>
+        <a:font script="Hang" typeface="맑은 고딕"/>
+        <a:font script="Hans" typeface="等线 Light"/>
+        <a:font script="Hant" typeface="新細明體"/>
+        <a:font script="Arab" typeface="Times New Roman"/>
+        <a:font script="Hebr" typeface="Times New Roman"/>
+        <a:font script="Thai" typeface="Angsana New"/>
+        <a:font script="Ethi" typeface="Nyala"/>
+        <a:font script="Beng" typeface="Vrinda"/>
+        <a:font script="Gujr" typeface="Shruti"/>
+        <a:font script="Khmr" typeface="MoolBoran"/>
+        <a:font script="Knda" typeface="Tunga"/>
+        <a:font script="Guru" typeface="Raavi"/>
+        <a:font script="Cans" typeface="Euphemia"/>
+        <a:font script="Cher" typeface="Plantagenet Cherokee"/>
+        <a:font script="Yiii" typeface="Microsoft Yi Baiti"/>
+        <a:font script="Tibt" typeface="Microsoft Himalaya"/>
+        <a:font script="Thaa" typeface="MV Boli"/>
+        <a:font script="Deva" typeface="Mangal"/>
+        <a:font script="Telu" typeface="Gautami"/>
+        <a:font script="Taml" typeface="Latha"/>
+        <a:font script="Syrc" typeface="Estrangelo Edessa"/>
+        <a:font script="Orya" typeface="Kalinga"/>
+        <a:font script="Mlym" typeface="Kartika"/>
+        <a:font script="Laoo" typeface="DokChampa"/>
+        <a:font script="Sinh" typeface="Iskoola Pota"/>
+        <a:font script="Mong" typeface="Mongolian Baiti"/>
+        <a:font script="Viet" typeface="Times New Roman"/>
+        <a:font script="Uigh" typeface="Microsoft Uighur"/>
+        <a:font script="Geor" typeface="Sylfaen"/>
+        <a:font script="Armn" typeface="Arial"/>
+        <a:font script="Bugi" typeface="Leelawadee UI"/>
+        <a:font script="Bopo" typeface="Microsoft JhengHei"/>
+        <a:font script="Java" typeface="Javanese Text"/>
+        <a:font script="Lisu" typeface="Segoe UI"/>
+        <a:font script="Mymr" typeface="Myanmar Text"/>
+        <a:font script="Nkoo" typeface="Ebrima"/>
+        <a:font script="Olck" typeface="Nirmala UI"/>
+        <a:font script="Osma" typeface="Ebrima"/>
+        <a:font script="Phag" typeface="Phagspa"/>
+        <a:font script="Syrn" typeface="Estrangelo Edessa"/>
+        <a:font script="Syrj" typeface="Estrangelo Edessa"/>
+        <a:font script="Syre" typeface="Estrangelo Edessa"/>
+        <a:font script="Sora" typeface="Nirmala UI"/>
+        <a:font script="Tale" typeface="Microsoft Tai Le"/>
+        <a:font script="Talu" typeface="Microsoft New Tai Lue"/>
+        <a:font script="Tfng" typeface="Ebrima"/>
+      </a:majorFont>
+      <a:minorFont>
+        <a:latin typeface="Calibri" panose="020F0502020204030204"/>
+        <a:ea typeface=""/>
+        <a:cs typeface=""/>
+        <a:font script="Jpan" typeface="游ゴシック"/>
+        <a:font script="Hang" typeface="맑은 고딕"/>
+        <a:font script="Hans" typeface="等线"/>
+        <a:font script="Hant" typeface="新細明體"/>
+        <a:font script="Arab" typeface="Arial"/>
+        <a:font script="Hebr" typeface="Arial"/>
+        <a:font script="Thai" typeface="Cordia New"/>
+        <a:font script="Ethi" typeface="Nyala"/>
+        <a:font script="Beng" typeface="Vrinda"/>
+        <a:font script="Gujr" typeface="Shruti"/>
+        <a:font script="Khmr" typeface="DaunPenh"/>
+        <a:font script="Knda" typeface="Tunga"/>
+        <a:font script="Guru" typeface="Raavi"/>
+        <a:font script="Cans" typeface="Euphemia"/>
+        <a:font script="Cher" typeface="Plantagenet Cherokee"/>
+        <a:font script="Yiii" typeface="Microsoft Yi Baiti"/>
+        <a:font script="Tibt" typeface="Microsoft Himalaya"/>
+        <a:font script="Thaa" typeface="MV Boli"/>
+        <a:font script="Deva" typeface="Mangal"/>
+        <a:font script="Telu" typeface="Gautami"/>
+        <a:font script="Taml" typeface="Latha"/>
+        <a:font script="Syrc" typeface="Estrangelo Edessa"/>
+        <a:font script="Orya" typeface="Kalinga"/>
+        <a:font script="Mlym" typeface="Kartika"/>
+        <a:font script="Laoo" typeface="DokChampa"/>
+        <a:font script="Sinh" typeface="Iskoola Pota"/>
+        <a:font script="Mong" typeface="Mongolian Baiti"/>
+        <a:font script="Viet" typeface="Arial"/>
+        <a:font script="Uigh" typeface="Microsoft Uighur"/>
+        <a:font script="Geor" typeface="Sylfaen"/>
+        <a:font script="Armn" typeface="Arial"/>
+        <a:font script="Bugi" typeface="Leelawadee UI"/>
+        <a:font script="Bopo" typeface="Microsoft JhengHei"/>
+        <a:font script="Java" typeface="Javanese Text"/>
+        <a:font script="Lisu" typeface="Segoe UI"/>
+        <a:font script="Mymr" typeface="Myanmar Text"/>
+        <a:font script="Nkoo" typeface="Ebrima"/>
+        <a:font script="Olck" typeface="Nirmala UI"/>
+        <a:font script="Osma" typeface="Ebrima"/>
+        <a:font script="Phag" typeface="Phagspa"/>
+        <a:font script="Syrn" typeface="Estrangelo Edessa"/>
+        <a:font script="Syrj" typeface="Estrangelo Edessa"/>
+        <a:font script="Syre" typeface="Estrangelo Edessa"/>
+        <a:font script="Sora" typeface="Nirmala UI"/>
+        <a:font script="Tale" typeface="Microsoft Tai Le"/>
+        <a:font script="Talu" typeface="Microsoft New Tai Lue"/>
+        <a:font script="Tfng" typeface="Ebrima"/>
+      </a:minorFont>
+    </a:fontScheme>
+    <a:fmtScheme name="Office">
+      <a:fillStyleLst>
+        <a:solidFill>
+          <a:schemeClr val="phClr"/>
+        </a:solidFill>
+        <a:gradFill rotWithShape="1">
+          <a:gsLst>
+            <a:gs pos="0">
+              <a:schemeClr val="phClr">
+                <a:lumMod val="110000"/>
+                <a:satMod val="105000"/>
+                <a:tint val="67000"/>
+              </a:schemeClr>
+            </a:gs>
+            <a:gs pos="50000">
+              <a:schemeClr val="phClr">
+                <a:lumMod val="105000"/>
+                <a:satMod val="103000"/>
+                <a:tint val="73000"/>
+              </a:schemeClr>
+            </a:gs>
+            <a:gs pos="100000">
+              <a:schemeClr val="phClr">
+                <a:lumMod val="105000"/>
+                <a:satMod val="109000"/>
+                <a:tint val="81000"/>
+              </a:schemeClr>
+            </a:gs>
+          </a:gsLst>
+          <a:lin ang="5400000" scaled="0"/>
+        </a:gradFill>
+        <a:gradFill rotWithShape="1">
+          <a:gsLst>
+            <a:gs pos="0">
+              <a:schemeClr val="phClr">
+                <a:satMod val="103000"/>
+                <a:lumMod val="102000"/>
+                <a:tint val="94000"/>
+              </a:schemeClr>
+            </a:gs>
+            <a:gs pos="50000">
+              <a:schemeClr val="phClr">
+                <a:satMod val="110000"/>
+                <a:lumMod val="100000"/>
+                <a:shade val="100000"/>
+              </a:schemeClr>
+            </a:gs>
+            <a:gs pos="100000">
+              <a:schemeClr val="phClr">
+                <a:lumMod val="99000"/>
+                <a:satMod val="120000"/>
+                <a:shade val="78000"/>
+              </a:schemeClr>
+            </a:gs>
+          </a:gsLst>
+          <a:lin ang="5400000" scaled="0"/>
+        </a:gradFill>
+      </a:fillStyleLst>
+      <a:lnStyleLst>
+        <a:ln w="6350" cap="flat" cmpd="sng" algn="ctr">
+          <a:solidFill>
+            <a:schemeClr val="phClr"/>
+          </a:solidFill>
+          <a:prstDash val="solid"/>
+          <a:miter lim="800000"/>
+        </a:ln>
+        <a:ln w="12700" cap="flat" cmpd="sng" algn="ctr">
+          <a:solidFill>
+            <a:schemeClr val="phClr"/>
+          </a:solidFill>
+          <a:prstDash val="solid"/>
+          <a:miter lim="800000"/>
+        </a:ln>
+        <a:ln w="19050" cap="flat" cmpd="sng" algn="ctr">
+          <a:solidFill>
+            <a:schemeClr val="phClr"/>
+          </a:solidFill>
+          <a:prstDash val="solid"/>
+          <a:miter lim="800000"/>
+        </a:ln>
+      </a:lnStyleLst>
+      <a:effectStyleLst>
+        <a:effectStyle>
+          <a:effectLst/>
+        </a:effectStyle>
+        <a:effectStyle>
+          <a:effectLst/>
+        </a:effectStyle>
+        <a:effectStyle>
+          <a:effectLst>
+            <a:outerShdw blurRad="57150" dist="19050" dir="5400000" algn="ctr" rotWithShape="0">
+              <a:srgbClr val="000000">
+                <a:alpha val="63000"/>
+              </a:srgbClr>
+            </a:outerShdw>
+          </a:effectLst>
+        </a:effectStyle>
+      </a:effectStyleLst>
+      <a:bgFillStyleLst>
+        <a:solidFill>
+          <a:schemeClr val="phClr"/>
+        </a:solidFill>
+        <a:solidFill>
+          <a:schemeClr val="phClr">
+            <a:tint val="95000"/>
+            <a:satMod val="170000"/>
+          </a:schemeClr>
+        </a:solidFill>
+        <a:gradFill rotWithShape="1">
+          <a:gsLst>
+            <a:gs pos="0">
+              <a:schemeClr val="phClr">
+                <a:tint val="93000"/>
+                <a:satMod val="150000"/>
+                <a:shade val="98000"/>
+                <a:lumMod val="102000"/>
+              </a:schemeClr>
+            </a:gs>
+            <a:gs pos="50000">
+              <a:schemeClr val="phClr">
+                <a:tint val="98000"/>
+                <a:satMod val="130000"/>
+                <a:shade val="90000"/>
+                <a:lumMod val="103000"/>
+              </a:schemeClr>
+            </a:gs>
+            <a:gs pos="100000">
+              <a:schemeClr val="phClr">
+                <a:shade val="63000"/>
+                <a:satMod val="120000"/>
+              </a:schemeClr>
+            </a:gs>
+          </a:gsLst>
+          <a:lin ang="5400000" scaled="0"/>
+        </a:gradFill>
+      </a:bgFillStyleLst>
+    </a:fmtScheme>
+  </a:themeElements>
+  <a:objectDefaults/>
+  <a:extraClrSchemeLst/>
+  <a:extLst>
+    <a:ext uri="{05A4C25C-085E-4340-85A3-A5531E510DB2}">
+      <thm15:themeFamily xmlns:thm15="http://schemas.microsoft.com/office/thememl/2012/main" name="Office Theme" id="{62F939B6-93AF-4DB8-9C6B-D6C7DFDC589F}" vid="{4A3C46E8-61CC-4603-A589-7422A47A8E4A}"/>
+    </a:ext>
+  </a:extLst>
+</a:theme>
 </file>